--- a/presentations/AL_L11_TraceRoom_Lesson.pptx
+++ b/presentations/AL_L11_TraceRoom_Lesson.pptx
@@ -516,7 +516,7 @@
             <a:r>
               <a:rPr lang="en-US" dirty="0"/>
               <a:t>Lesson 11: Trace room.
-Open the experience at revise360.co.uk and hand out AL_L11_Traceroom_Worksheet.docx.</a:t>
+Open the experience at revise360.co.uk and hand out AL_L11_TraceRoom_Worksheet.docx.</a:t>
             </a:r>
             <a:endParaRPr lang="en-US" dirty="0"/>
           </a:p>

--- a/presentations/AL_L11_TraceRoom_Lesson.pptx
+++ b/presentations/AL_L11_TraceRoom_Lesson.pptx
@@ -19,9 +19,11 @@
     <p:sldId id="267" r:id="rId13"/>
     <p:sldId id="268" r:id="rId14"/>
     <p:sldId id="269" r:id="rId15"/>
+    <p:sldId id="270" r:id="rId16"/>
+    <p:sldId id="271" r:id="rId17"/>
   </p:sldIdLst>
   <p:notesMasterIdLst>
-    <p:notesMasterId r:id="rId16"/>
+    <p:notesMasterId r:id="rId18"/>
   </p:notesMasterIdLst>
   <p:sldSz cx="12192000" cy="6858000"/>
   <p:notesSz cx="6858000" cy="12192000"/>
@@ -692,7 +694,10 @@
           <a:p>
             <a:r>
               <a:rPr lang="en-US" dirty="0"/>
-              <a:t>Make them commit to an answer on paper before they tap the star. Guessing first costs them the learning.</a:t>
+              <a:t>Fill this in at the front with the class calling out each value. Do not reveal the finished table: build it row by row.
+The program is deliberately not one the pupils are about to trace. The stations halve a number, grade a mark and find a bug; the exam practice runs with an input of 9. A countdown in twos is none of them.
+The error worth provoking is stopping at x = 4. Ask the class whether the loop is finished there and let somebody check 4 &gt; 3 aloud. That is the whole skill: the condition is tested before every pass, including the one you did not expect.
+Say this out loud: Four lines are printed: 8, 6, 4, 2. The loop ends because 2 &gt; 3 is false - so check the condition once more after the final change, every time.</a:t>
             </a:r>
             <a:endParaRPr lang="en-US" dirty="0"/>
           </a:p>
@@ -780,7 +785,13 @@
           <a:p>
             <a:r>
               <a:rPr lang="en-US" dirty="0"/>
-              <a:t>Use these as a settler, or as something for early finishers to read in the experience.</a:t>
+              <a:t>The answer is A: None: the body never runs.
+Do not say it yet. Every pupil commits first - fingers, whiteboards or a show of hands on each letter in turn - and you count the split before anyone can change their mind.
+IF MOST OF THE CLASS IS RIGHT: say why it is right in one sentence and go straight on to the independent work.
+IF A SIGNIFICANT GROUP IS ON ONE WRONG LETTER: that option is the misconception to teach against before anyone goes on. Go back to station 3, Tracing a loop, and work through its example again, aloud, with the class watching, then re-ask this question.
+The course's own response to a wrong answer here: A while loop may run zero times; a do-until always runs at least once.
+A limitation, stated rather than papered over: one response covers every wrong option; it does not say what to revisit for each one. The course does not record what each separate wrong option means, and this slide does not invent it. Decide your own reteach for each option before the lesson; the options above are the start of it.
+This is a real activity from the experience (al-l11-s3-c2), so the wording here is the wording a pupil will see.</a:t>
             </a:r>
             <a:endParaRPr lang="en-US" dirty="0"/>
           </a:p>
@@ -868,7 +879,7 @@
           <a:p>
             <a:r>
               <a:rPr lang="en-US" dirty="0"/>
-              <a:t>Timed and silent. Mark against the answer sheet, then ask students to record their weakest area.</a:t>
+              <a:t>Make them commit to an answer on paper before they tap the star. Guessing first costs them the learning.</a:t>
             </a:r>
             <a:endParaRPr lang="en-US" dirty="0"/>
           </a:p>
@@ -956,7 +967,7 @@
           <a:p>
             <a:r>
               <a:rPr lang="en-US" dirty="0"/>
-              <a:t>Students copy their score-screen breakdown onto the worksheet, then rate themselves here.</a:t>
+              <a:t>Use these as a settler, or as something for early finishers to read in the experience.</a:t>
             </a:r>
             <a:endParaRPr lang="en-US" dirty="0"/>
           </a:p>
@@ -980,6 +991,182 @@
             <a:fld id="{F7021451-1387-4CA6-816F-3879F97B5CBC}" type="slidenum">
               <a:rPr lang="en-US"/>
               <a:t>14</a:t>
+            </a:fld>
+            <a:endParaRPr lang="en-US"/>
+          </a:p>
+        </p:txBody>
+      </p:sp>
+    </p:spTree>
+    <p:extLst>
+      <p:ext uri="{BB962C8B-B14F-4D97-AF65-F5344CB8AC3E}">
+        <p14:creationId xmlns:p14="http://schemas.microsoft.com/office/powerpoint/2010/main" val="1024086991"/>
+      </p:ext>
+    </p:extLst>
+  </p:cSld>
+  <p:clrMapOvr>
+    <a:masterClrMapping/>
+  </p:clrMapOvr>
+</p:notes>
+</file>
+
+<file path=ppt/notesSlides/notesSlide15.xml><?xml version="1.0" encoding="utf-8"?>
+<p:notes xmlns:a="http://schemas.openxmlformats.org/drawingml/2006/main" xmlns:r="http://schemas.openxmlformats.org/officeDocument/2006/relationships" xmlns:p="http://schemas.openxmlformats.org/presentationml/2006/main">
+  <p:cSld>
+    <p:spTree>
+      <p:nvGrpSpPr>
+        <p:cNvPr id="1" name=""/>
+        <p:cNvGrpSpPr/>
+        <p:nvPr/>
+      </p:nvGrpSpPr>
+      <p:grpSpPr>
+        <a:xfrm>
+          <a:off x="0" y="0"/>
+          <a:ext cx="0" cy="0"/>
+          <a:chOff x="0" y="0"/>
+          <a:chExt cx="0" cy="0"/>
+        </a:xfrm>
+      </p:grpSpPr>
+      <p:sp>
+        <p:nvSpPr>
+          <p:cNvPr id="2" name="Slide Image Placeholder 1"/>
+          <p:cNvSpPr>
+            <a:spLocks noGrp="1" noRot="1" noChangeAspect="1"/>
+          </p:cNvSpPr>
+          <p:nvPr>
+            <p:ph type="sldImg"/>
+          </p:nvPr>
+        </p:nvSpPr>
+        <p:spPr/>
+      </p:sp>
+      <p:sp>
+        <p:nvSpPr>
+          <p:cNvPr id="3" name="Notes Placeholder 2"/>
+          <p:cNvSpPr>
+            <a:spLocks noGrp="1"/>
+          </p:cNvSpPr>
+          <p:nvPr>
+            <p:ph type="body" idx="1"/>
+          </p:nvPr>
+        </p:nvSpPr>
+        <p:spPr/>
+        <p:txBody>
+          <a:bodyPr/>
+          <a:lstStyle/>
+          <a:p>
+            <a:r>
+              <a:rPr lang="en-US" dirty="0"/>
+              <a:t>Timed and silent. Mark against the answer sheet, then ask students to record their weakest area.</a:t>
+            </a:r>
+            <a:endParaRPr lang="en-US" dirty="0"/>
+          </a:p>
+        </p:txBody>
+      </p:sp>
+      <p:sp>
+        <p:nvSpPr>
+          <p:cNvPr id="4" name="Slide Number Placeholder 3"/>
+          <p:cNvSpPr>
+            <a:spLocks noGrp="1"/>
+          </p:cNvSpPr>
+          <p:nvPr>
+            <p:ph type="sldNum" sz="quarter" idx="10"/>
+          </p:nvPr>
+        </p:nvSpPr>
+        <p:spPr/>
+        <p:txBody>
+          <a:bodyPr/>
+          <a:lstStyle/>
+          <a:p>
+            <a:fld id="{F7021451-1387-4CA6-816F-3879F97B5CBC}" type="slidenum">
+              <a:rPr lang="en-US"/>
+              <a:t>15</a:t>
+            </a:fld>
+            <a:endParaRPr lang="en-US"/>
+          </a:p>
+        </p:txBody>
+      </p:sp>
+    </p:spTree>
+    <p:extLst>
+      <p:ext uri="{BB962C8B-B14F-4D97-AF65-F5344CB8AC3E}">
+        <p14:creationId xmlns:p14="http://schemas.microsoft.com/office/powerpoint/2010/main" val="1024086991"/>
+      </p:ext>
+    </p:extLst>
+  </p:cSld>
+  <p:clrMapOvr>
+    <a:masterClrMapping/>
+  </p:clrMapOvr>
+</p:notes>
+</file>
+
+<file path=ppt/notesSlides/notesSlide16.xml><?xml version="1.0" encoding="utf-8"?>
+<p:notes xmlns:a="http://schemas.openxmlformats.org/drawingml/2006/main" xmlns:r="http://schemas.openxmlformats.org/officeDocument/2006/relationships" xmlns:p="http://schemas.openxmlformats.org/presentationml/2006/main">
+  <p:cSld>
+    <p:spTree>
+      <p:nvGrpSpPr>
+        <p:cNvPr id="1" name=""/>
+        <p:cNvGrpSpPr/>
+        <p:nvPr/>
+      </p:nvGrpSpPr>
+      <p:grpSpPr>
+        <a:xfrm>
+          <a:off x="0" y="0"/>
+          <a:ext cx="0" cy="0"/>
+          <a:chOff x="0" y="0"/>
+          <a:chExt cx="0" cy="0"/>
+        </a:xfrm>
+      </p:grpSpPr>
+      <p:sp>
+        <p:nvSpPr>
+          <p:cNvPr id="2" name="Slide Image Placeholder 1"/>
+          <p:cNvSpPr>
+            <a:spLocks noGrp="1" noRot="1" noChangeAspect="1"/>
+          </p:cNvSpPr>
+          <p:nvPr>
+            <p:ph type="sldImg"/>
+          </p:nvPr>
+        </p:nvSpPr>
+        <p:spPr/>
+      </p:sp>
+      <p:sp>
+        <p:nvSpPr>
+          <p:cNvPr id="3" name="Notes Placeholder 2"/>
+          <p:cNvSpPr>
+            <a:spLocks noGrp="1"/>
+          </p:cNvSpPr>
+          <p:nvPr>
+            <p:ph type="body" idx="1"/>
+          </p:nvPr>
+        </p:nvSpPr>
+        <p:spPr/>
+        <p:txBody>
+          <a:bodyPr/>
+          <a:lstStyle/>
+          <a:p>
+            <a:r>
+              <a:rPr lang="en-US" dirty="0"/>
+              <a:t>Students copy their score-screen breakdown onto the worksheet, then rate themselves here.</a:t>
+            </a:r>
+            <a:endParaRPr lang="en-US" dirty="0"/>
+          </a:p>
+        </p:txBody>
+      </p:sp>
+      <p:sp>
+        <p:nvSpPr>
+          <p:cNvPr id="4" name="Slide Number Placeholder 3"/>
+          <p:cNvSpPr>
+            <a:spLocks noGrp="1"/>
+          </p:cNvSpPr>
+          <p:nvPr>
+            <p:ph type="sldNum" sz="quarter" idx="10"/>
+          </p:nvPr>
+        </p:nvSpPr>
+        <p:spPr/>
+        <p:txBody>
+          <a:bodyPr/>
+          <a:lstStyle/>
+          <a:p>
+            <a:fld id="{F7021451-1387-4CA6-816F-3879F97B5CBC}" type="slidenum">
+              <a:rPr lang="en-US"/>
+              <a:t>16</a:t>
             </a:fld>
             <a:endParaRPr lang="en-US"/>
           </a:p>
@@ -2943,75 +3130,14 @@
       </p:sp>
       <p:sp>
         <p:nvSpPr>
-          <p:cNvPr id="5" name="Shape 3"/>
-          <p:cNvSpPr/>
-          <p:nvPr/>
-        </p:nvSpPr>
-        <p:spPr>
-          <a:xfrm>
-            <a:off x="502920" y="438912"/>
-            <a:ext cx="3108960" cy="502920"/>
-          </a:xfrm>
-          <a:prstGeom prst="roundRect">
-            <a:avLst>
-              <a:gd name="adj" fmla="val 18182"/>
-            </a:avLst>
-          </a:prstGeom>
-          <a:solidFill>
-            <a:srgbClr val="F4B942"/>
-          </a:solidFill>
-          <a:ln/>
-        </p:spPr>
-      </p:sp>
-      <p:sp>
-        <p:nvSpPr>
-          <p:cNvPr id="6" name="Text 4"/>
-          <p:cNvSpPr txBox="1"/>
-          <p:nvPr/>
-        </p:nvSpPr>
-        <p:spPr>
-          <a:xfrm>
-            <a:off x="502920" y="438912"/>
-            <a:ext cx="3108960" cy="502920"/>
-          </a:xfrm>
-          <a:prstGeom prst="rect">
-            <a:avLst/>
-          </a:prstGeom>
-          <a:noFill/>
-          <a:ln/>
-        </p:spPr>
-        <p:txBody>
-          <a:bodyPr wrap="square" lIns="0" tIns="0" rIns="0" bIns="0" rtlCol="0" anchor="ctr"/>
-          <a:lstStyle/>
-          <a:p>
-            <a:pPr algn="ctr" indent="0" marL="0">
-              <a:buNone/>
-            </a:pPr>
-            <a:r>
-              <a:rPr lang="en-US" sz="1300" b="1" dirty="0">
-                <a:solidFill>
-                  <a:srgbClr val="101828"/>
-                </a:solidFill>
-                <a:latin typeface="IBM Plex Mono" pitchFamily="34" charset="0"/>
-                <a:ea typeface="IBM Plex Mono" pitchFamily="34" charset="-122"/>
-                <a:cs typeface="IBM Plex Mono" pitchFamily="34" charset="-120"/>
-              </a:rPr>
-              <a:t>★  FINAL CHALLENGE</a:t>
-            </a:r>
-            <a:endParaRPr lang="en-US" sz="1300" dirty="0"/>
-          </a:p>
-        </p:txBody>
-      </p:sp>
-      <p:sp>
-        <p:nvSpPr>
-          <p:cNvPr id="7" name="Text 5"/>
-          <p:cNvSpPr txBox="1"/>
-          <p:nvPr/>
-        </p:nvSpPr>
-        <p:spPr>
-          <a:xfrm>
-            <a:off x="502920" y="1097280"/>
-            <a:ext cx="11155680" cy="731520"/>
+          <p:cNvPr id="5" name="Text 3"/>
+          <p:cNvSpPr txBox="1"/>
+          <p:nvPr/>
+        </p:nvSpPr>
+        <p:spPr>
+          <a:xfrm>
+            <a:off x="502920" y="411480"/>
+            <a:ext cx="11155680" cy="777240"/>
           </a:xfrm>
           <a:prstGeom prst="rect">
             <a:avLst/>
@@ -3027,7 +3153,7 @@
               <a:buNone/>
             </a:pPr>
             <a:r>
-              <a:rPr lang="en-US" sz="3400" b="1" dirty="0">
+              <a:rPr lang="en-US" sz="3200" b="1" dirty="0">
                 <a:solidFill>
                   <a:srgbClr val="101828"/>
                 </a:solidFill>
@@ -3035,26 +3161,65 @@
                 <a:ea typeface="IBM Plex Sans" pitchFamily="34" charset="-122"/>
                 <a:cs typeface="IBM Plex Sans" pitchFamily="34" charset="-120"/>
               </a:rPr>
-              <a:t>Trace it</a:t>
-            </a:r>
-            <a:endParaRPr lang="en-US" sz="3400" dirty="0"/>
-          </a:p>
-        </p:txBody>
-      </p:sp>
-      <p:sp>
-        <p:nvSpPr>
-          <p:cNvPr id="8" name="Shape 6"/>
+              <a:t>Watch me trace one</a:t>
+            </a:r>
+            <a:endParaRPr lang="en-US" sz="3200" dirty="0"/>
+          </a:p>
+        </p:txBody>
+      </p:sp>
+      <p:sp>
+        <p:nvSpPr>
+          <p:cNvPr id="6" name="Text 4"/>
+          <p:cNvSpPr txBox="1"/>
+          <p:nvPr/>
+        </p:nvSpPr>
+        <p:spPr>
+          <a:xfrm>
+            <a:off x="502920" y="1170432"/>
+            <a:ext cx="11155680" cy="411480"/>
+          </a:xfrm>
+          <a:prstGeom prst="rect">
+            <a:avLst/>
+          </a:prstGeom>
+          <a:noFill/>
+          <a:ln/>
+        </p:spPr>
+        <p:txBody>
+          <a:bodyPr wrap="square" lIns="0" tIns="0" rIns="0" bIns="0" rtlCol="0" anchor="ctr"/>
+          <a:lstStyle/>
+          <a:p>
+            <a:pPr indent="0" marL="0">
+              <a:buNone/>
+            </a:pPr>
+            <a:r>
+              <a:rPr lang="en-US" sz="1500" dirty="0">
+                <a:solidFill>
+                  <a:srgbClr val="667085"/>
+                </a:solidFill>
+                <a:latin typeface="IBM Plex Sans" pitchFamily="34" charset="0"/>
+                <a:ea typeface="IBM Plex Sans" pitchFamily="34" charset="-122"/>
+                <a:cs typeface="IBM Plex Sans" pitchFamily="34" charset="-120"/>
+              </a:rPr>
+              <a:t>A different program from yours, so you get the method and not the answer</a:t>
+            </a:r>
+            <a:endParaRPr lang="en-US" sz="1500" dirty="0"/>
+          </a:p>
+        </p:txBody>
+      </p:sp>
+      <p:sp>
+        <p:nvSpPr>
+          <p:cNvPr id="7" name="Shape 5"/>
           <p:cNvSpPr/>
           <p:nvPr/>
         </p:nvSpPr>
         <p:spPr>
           <a:xfrm>
-            <a:off x="502920" y="2011680"/>
-            <a:ext cx="11155680" cy="2194560"/>
+            <a:off x="502920" y="1719072"/>
+            <a:ext cx="3566160" cy="2473980"/>
           </a:xfrm>
           <a:prstGeom prst="roundRect">
             <a:avLst>
-              <a:gd name="adj" fmla="val 5000"/>
+              <a:gd name="adj" fmla="val 4435"/>
             </a:avLst>
           </a:prstGeom>
           <a:solidFill>
@@ -3062,7 +3227,7 @@
           </a:solidFill>
           <a:ln w="15875">
             <a:solidFill>
-              <a:srgbClr val="2D63FF"/>
+              <a:srgbClr val="D9DEE7"/>
             </a:solidFill>
             <a:prstDash val="solid"/>
           </a:ln>
@@ -3070,33 +3235,72 @@
       </p:sp>
       <p:sp>
         <p:nvSpPr>
+          <p:cNvPr id="8" name="Text 6"/>
+          <p:cNvSpPr txBox="1"/>
+          <p:nvPr/>
+        </p:nvSpPr>
+        <p:spPr>
+          <a:xfrm>
+            <a:off x="777240" y="1883664"/>
+            <a:ext cx="3017520" cy="292608"/>
+          </a:xfrm>
+          <a:prstGeom prst="rect">
+            <a:avLst/>
+          </a:prstGeom>
+          <a:noFill/>
+          <a:ln/>
+        </p:spPr>
+        <p:txBody>
+          <a:bodyPr wrap="square" lIns="0" tIns="0" rIns="0" bIns="0" rtlCol="0" anchor="ctr"/>
+          <a:lstStyle/>
+          <a:p>
+            <a:pPr indent="0" marL="0">
+              <a:buNone/>
+            </a:pPr>
+            <a:r>
+              <a:rPr lang="en-US" sz="1100" b="1" dirty="0">
+                <a:solidFill>
+                  <a:srgbClr val="667085"/>
+                </a:solidFill>
+                <a:latin typeface="IBM Plex Mono" pitchFamily="34" charset="0"/>
+                <a:ea typeface="IBM Plex Mono" pitchFamily="34" charset="-122"/>
+                <a:cs typeface="IBM Plex Mono" pitchFamily="34" charset="-120"/>
+              </a:rPr>
+              <a:t>THE PROGRAM</a:t>
+            </a:r>
+            <a:endParaRPr lang="en-US" sz="1100" dirty="0"/>
+          </a:p>
+        </p:txBody>
+      </p:sp>
+      <p:sp>
+        <p:nvSpPr>
           <p:cNvPr id="9" name="Text 7"/>
           <p:cNvSpPr txBox="1"/>
           <p:nvPr/>
         </p:nvSpPr>
         <p:spPr>
           <a:xfrm>
-            <a:off x="1005840" y="2331720"/>
-            <a:ext cx="10149840" cy="1554480"/>
-          </a:xfrm>
-          <a:prstGeom prst="rect">
-            <a:avLst/>
-          </a:prstGeom>
-          <a:noFill/>
-          <a:ln/>
-        </p:spPr>
-        <p:txBody>
-          <a:bodyPr wrap="square" lIns="0" tIns="0" rIns="0" bIns="0" rtlCol="0" anchor="ctr"/>
+            <a:off x="777240" y="2231136"/>
+            <a:ext cx="3017520" cy="1815612"/>
+          </a:xfrm>
+          <a:prstGeom prst="rect">
+            <a:avLst/>
+          </a:prstGeom>
+          <a:noFill/>
+          <a:ln/>
+        </p:spPr>
+        <p:txBody>
+          <a:bodyPr wrap="square" lIns="0" tIns="0" rIns="0" bIns="0" rtlCol="0" anchor="t"/>
           <a:lstStyle/>
           <a:p>
             <a:pPr indent="0" marL="0">
               <a:lnSpc>
-                <a:spcPct val="130000"/>
+                <a:spcPct val="118000"/>
               </a:lnSpc>
               <a:buNone/>
             </a:pPr>
             <a:r>
-              <a:rPr lang="en-US" sz="2200" dirty="0">
+              <a:rPr lang="en-US" sz="1100" dirty="0">
                 <a:solidFill>
                   <a:srgbClr val="101828"/>
                 </a:solidFill>
@@ -3104,48 +3308,629 @@
                 <a:ea typeface="IBM Plex Sans" pitchFamily="34" charset="-122"/>
                 <a:cs typeface="IBM Plex Sans" pitchFamily="34" charset="-120"/>
               </a:rPr>
-              <a:t>One last program to follow line by line. Tap the star and complete the table.</a:t>
-            </a:r>
-            <a:endParaRPr lang="en-US" sz="2200" dirty="0"/>
-          </a:p>
-        </p:txBody>
-      </p:sp>
-      <p:sp>
-        <p:nvSpPr>
-          <p:cNvPr id="10" name="Text 8"/>
-          <p:cNvSpPr txBox="1"/>
-          <p:nvPr/>
-        </p:nvSpPr>
-        <p:spPr>
-          <a:xfrm>
-            <a:off x="502920" y="4526280"/>
-            <a:ext cx="11155680" cy="457200"/>
-          </a:xfrm>
-          <a:prstGeom prst="rect">
-            <a:avLst/>
-          </a:prstGeom>
-          <a:noFill/>
-          <a:ln/>
-        </p:spPr>
-        <p:txBody>
-          <a:bodyPr wrap="square" lIns="0" tIns="0" rIns="0" bIns="0" rtlCol="0" anchor="ctr"/>
-          <a:lstStyle/>
+              <a:t>x = 10</a:t>
+            </a:r>
+            <a:endParaRPr lang="en-US" sz="1100" dirty="0"/>
+          </a:p>
           <a:p>
             <a:pPr indent="0" marL="0">
-              <a:buNone/>
-            </a:pPr>
-            <a:r>
-              <a:rPr lang="en-US" sz="1600" dirty="0">
-                <a:solidFill>
-                  <a:srgbClr val="667085"/>
+              <a:lnSpc>
+                <a:spcPct val="118000"/>
+              </a:lnSpc>
+              <a:buNone/>
+            </a:pPr>
+            <a:r>
+              <a:rPr lang="en-US" sz="1100" dirty="0">
+                <a:solidFill>
+                  <a:srgbClr val="101828"/>
                 </a:solidFill>
                 <a:latin typeface="IBM Plex Sans" pitchFamily="34" charset="0"/>
                 <a:ea typeface="IBM Plex Sans" pitchFamily="34" charset="-122"/>
                 <a:cs typeface="IBM Plex Sans" pitchFamily="34" charset="-120"/>
               </a:rPr>
-              <a:t>Predict on paper first, then look down and test it.</a:t>
-            </a:r>
-            <a:endParaRPr lang="en-US" sz="1600" dirty="0"/>
+              <a:t>while x &gt; 3</a:t>
+            </a:r>
+            <a:endParaRPr lang="en-US" sz="1100" dirty="0"/>
+          </a:p>
+          <a:p>
+            <a:pPr indent="0" marL="0">
+              <a:lnSpc>
+                <a:spcPct val="118000"/>
+              </a:lnSpc>
+              <a:buNone/>
+            </a:pPr>
+            <a:r>
+              <a:rPr lang="en-US" sz="1100" dirty="0">
+                <a:solidFill>
+                  <a:srgbClr val="101828"/>
+                </a:solidFill>
+                <a:latin typeface="IBM Plex Sans" pitchFamily="34" charset="0"/>
+                <a:ea typeface="IBM Plex Sans" pitchFamily="34" charset="-122"/>
+                <a:cs typeface="IBM Plex Sans" pitchFamily="34" charset="-120"/>
+              </a:rPr>
+              <a:t>    x = x - 2</a:t>
+            </a:r>
+            <a:endParaRPr lang="en-US" sz="1100" dirty="0"/>
+          </a:p>
+          <a:p>
+            <a:pPr indent="0" marL="0">
+              <a:lnSpc>
+                <a:spcPct val="118000"/>
+              </a:lnSpc>
+              <a:buNone/>
+            </a:pPr>
+            <a:r>
+              <a:rPr lang="en-US" sz="1100" dirty="0">
+                <a:solidFill>
+                  <a:srgbClr val="101828"/>
+                </a:solidFill>
+                <a:latin typeface="IBM Plex Sans" pitchFamily="34" charset="0"/>
+                <a:ea typeface="IBM Plex Sans" pitchFamily="34" charset="-122"/>
+                <a:cs typeface="IBM Plex Sans" pitchFamily="34" charset="-120"/>
+              </a:rPr>
+              <a:t>    print(x)</a:t>
+            </a:r>
+            <a:endParaRPr lang="en-US" sz="1100" dirty="0"/>
+          </a:p>
+          <a:p>
+            <a:pPr indent="0" marL="0">
+              <a:lnSpc>
+                <a:spcPct val="118000"/>
+              </a:lnSpc>
+              <a:buNone/>
+            </a:pPr>
+            <a:r>
+              <a:rPr lang="en-US" sz="1100" dirty="0">
+                <a:solidFill>
+                  <a:srgbClr val="101828"/>
+                </a:solidFill>
+                <a:latin typeface="IBM Plex Sans" pitchFamily="34" charset="0"/>
+                <a:ea typeface="IBM Plex Sans" pitchFamily="34" charset="-122"/>
+                <a:cs typeface="IBM Plex Sans" pitchFamily="34" charset="-120"/>
+              </a:rPr>
+              <a:t>endwhile</a:t>
+            </a:r>
+            <a:endParaRPr lang="en-US" sz="1100" dirty="0"/>
+          </a:p>
+        </p:txBody>
+      </p:sp>
+      <p:sp>
+        <p:nvSpPr>
+          <p:cNvPr id="10" name="Shape 8"/>
+          <p:cNvSpPr/>
+          <p:nvPr/>
+        </p:nvSpPr>
+        <p:spPr>
+          <a:xfrm>
+            <a:off x="4297680" y="1719072"/>
+            <a:ext cx="3566160" cy="2473980"/>
+          </a:xfrm>
+          <a:prstGeom prst="roundRect">
+            <a:avLst>
+              <a:gd name="adj" fmla="val 4435"/>
+            </a:avLst>
+          </a:prstGeom>
+          <a:solidFill>
+            <a:srgbClr val="FFFFFF"/>
+          </a:solidFill>
+          <a:ln w="15875">
+            <a:solidFill>
+              <a:srgbClr val="D9DEE7"/>
+            </a:solidFill>
+            <a:prstDash val="solid"/>
+          </a:ln>
+        </p:spPr>
+      </p:sp>
+      <p:sp>
+        <p:nvSpPr>
+          <p:cNvPr id="11" name="Text 9"/>
+          <p:cNvSpPr txBox="1"/>
+          <p:nvPr/>
+        </p:nvSpPr>
+        <p:spPr>
+          <a:xfrm>
+            <a:off x="4572000" y="1883664"/>
+            <a:ext cx="3017520" cy="292608"/>
+          </a:xfrm>
+          <a:prstGeom prst="rect">
+            <a:avLst/>
+          </a:prstGeom>
+          <a:noFill/>
+          <a:ln/>
+        </p:spPr>
+        <p:txBody>
+          <a:bodyPr wrap="square" lIns="0" tIns="0" rIns="0" bIns="0" rtlCol="0" anchor="ctr"/>
+          <a:lstStyle/>
+          <a:p>
+            <a:pPr indent="0" marL="0">
+              <a:buNone/>
+            </a:pPr>
+            <a:r>
+              <a:rPr lang="en-US" sz="1100" b="1" dirty="0">
+                <a:solidFill>
+                  <a:srgbClr val="667085"/>
+                </a:solidFill>
+                <a:latin typeface="IBM Plex Mono" pitchFamily="34" charset="0"/>
+                <a:ea typeface="IBM Plex Mono" pitchFamily="34" charset="-122"/>
+                <a:cs typeface="IBM Plex Mono" pitchFamily="34" charset="-120"/>
+              </a:rPr>
+              <a:t>WHAT I'M THINKING</a:t>
+            </a:r>
+            <a:endParaRPr lang="en-US" sz="1100" dirty="0"/>
+          </a:p>
+        </p:txBody>
+      </p:sp>
+      <p:sp>
+        <p:nvSpPr>
+          <p:cNvPr id="12" name="Text 10"/>
+          <p:cNvSpPr txBox="1"/>
+          <p:nvPr/>
+        </p:nvSpPr>
+        <p:spPr>
+          <a:xfrm>
+            <a:off x="4572000" y="2231136"/>
+            <a:ext cx="3017520" cy="1815612"/>
+          </a:xfrm>
+          <a:prstGeom prst="rect">
+            <a:avLst/>
+          </a:prstGeom>
+          <a:noFill/>
+          <a:ln/>
+        </p:spPr>
+        <p:txBody>
+          <a:bodyPr wrap="square" lIns="0" tIns="0" rIns="0" bIns="0" rtlCol="0" anchor="t"/>
+          <a:lstStyle/>
+          <a:p>
+            <a:pPr indent="0" marL="0">
+              <a:lnSpc>
+                <a:spcPct val="118000"/>
+              </a:lnSpc>
+              <a:buNone/>
+            </a:pPr>
+            <a:r>
+              <a:rPr lang="en-US" sz="1100" dirty="0">
+                <a:solidFill>
+                  <a:srgbClr val="101828"/>
+                </a:solidFill>
+                <a:latin typeface="IBM Plex Sans" pitchFamily="34" charset="0"/>
+                <a:ea typeface="IBM Plex Sans" pitchFamily="34" charset="-122"/>
+                <a:cs typeface="IBM Plex Sans" pitchFamily="34" charset="-120"/>
+              </a:rPr>
+              <a:t>A trace table has one column per variable and one for anything printed.</a:t>
+            </a:r>
+            <a:endParaRPr lang="en-US" sz="1100" dirty="0"/>
+          </a:p>
+          <a:p>
+            <a:pPr indent="0" marL="0">
+              <a:lnSpc>
+                <a:spcPct val="118000"/>
+              </a:lnSpc>
+              <a:buNone/>
+            </a:pPr>
+            <a:endParaRPr lang="en-US" sz="1100" dirty="0"/>
+          </a:p>
+          <a:p>
+            <a:pPr indent="0" marL="0">
+              <a:lnSpc>
+                <a:spcPct val="118000"/>
+              </a:lnSpc>
+              <a:buNone/>
+            </a:pPr>
+            <a:r>
+              <a:rPr lang="en-US" sz="1100" dirty="0">
+                <a:solidFill>
+                  <a:srgbClr val="101828"/>
+                </a:solidFill>
+                <a:latin typeface="IBM Plex Sans" pitchFamily="34" charset="0"/>
+                <a:ea typeface="IBM Plex Sans" pitchFamily="34" charset="-122"/>
+                <a:cs typeface="IBM Plex Sans" pitchFamily="34" charset="-120"/>
+              </a:rPr>
+              <a:t>One row per pass of the loop.</a:t>
+            </a:r>
+            <a:endParaRPr lang="en-US" sz="1100" dirty="0"/>
+          </a:p>
+          <a:p>
+            <a:pPr indent="0" marL="0">
+              <a:lnSpc>
+                <a:spcPct val="118000"/>
+              </a:lnSpc>
+              <a:buNone/>
+            </a:pPr>
+            <a:endParaRPr lang="en-US" sz="1100" dirty="0"/>
+          </a:p>
+          <a:p>
+            <a:pPr indent="0" marL="0">
+              <a:lnSpc>
+                <a:spcPct val="118000"/>
+              </a:lnSpc>
+              <a:buNone/>
+            </a:pPr>
+            <a:r>
+              <a:rPr lang="en-US" sz="1100" dirty="0">
+                <a:solidFill>
+                  <a:srgbClr val="101828"/>
+                </a:solidFill>
+                <a:latin typeface="IBM Plex Sans" pitchFamily="34" charset="0"/>
+                <a:ea typeface="IBM Plex Sans" pitchFamily="34" charset="-122"/>
+                <a:cs typeface="IBM Plex Sans" pitchFamily="34" charset="-120"/>
+              </a:rPr>
+              <a:t>I check the condition BEFORE each pass, not after.</a:t>
+            </a:r>
+            <a:endParaRPr lang="en-US" sz="1100" dirty="0"/>
+          </a:p>
+        </p:txBody>
+      </p:sp>
+      <p:sp>
+        <p:nvSpPr>
+          <p:cNvPr id="13" name="Shape 11"/>
+          <p:cNvSpPr/>
+          <p:nvPr/>
+        </p:nvSpPr>
+        <p:spPr>
+          <a:xfrm>
+            <a:off x="8092440" y="1719072"/>
+            <a:ext cx="3566160" cy="2473980"/>
+          </a:xfrm>
+          <a:prstGeom prst="roundRect">
+            <a:avLst>
+              <a:gd name="adj" fmla="val 4435"/>
+            </a:avLst>
+          </a:prstGeom>
+          <a:solidFill>
+            <a:srgbClr val="FFFFFF"/>
+          </a:solidFill>
+          <a:ln w="15875">
+            <a:solidFill>
+              <a:srgbClr val="D9DEE7"/>
+            </a:solidFill>
+            <a:prstDash val="solid"/>
+          </a:ln>
+        </p:spPr>
+      </p:sp>
+      <p:sp>
+        <p:nvSpPr>
+          <p:cNvPr id="14" name="Text 12"/>
+          <p:cNvSpPr txBox="1"/>
+          <p:nvPr/>
+        </p:nvSpPr>
+        <p:spPr>
+          <a:xfrm>
+            <a:off x="8366760" y="1883664"/>
+            <a:ext cx="3017520" cy="292608"/>
+          </a:xfrm>
+          <a:prstGeom prst="rect">
+            <a:avLst/>
+          </a:prstGeom>
+          <a:noFill/>
+          <a:ln/>
+        </p:spPr>
+        <p:txBody>
+          <a:bodyPr wrap="square" lIns="0" tIns="0" rIns="0" bIns="0" rtlCol="0" anchor="ctr"/>
+          <a:lstStyle/>
+          <a:p>
+            <a:pPr indent="0" marL="0">
+              <a:buNone/>
+            </a:pPr>
+            <a:r>
+              <a:rPr lang="en-US" sz="1100" b="1" dirty="0">
+                <a:solidFill>
+                  <a:srgbClr val="667085"/>
+                </a:solidFill>
+                <a:latin typeface="IBM Plex Mono" pitchFamily="34" charset="0"/>
+                <a:ea typeface="IBM Plex Mono" pitchFamily="34" charset="-122"/>
+                <a:cs typeface="IBM Plex Mono" pitchFamily="34" charset="-120"/>
+              </a:rPr>
+              <a:t>HOW I FILL IT IN</a:t>
+            </a:r>
+            <a:endParaRPr lang="en-US" sz="1100" dirty="0"/>
+          </a:p>
+        </p:txBody>
+      </p:sp>
+      <p:sp>
+        <p:nvSpPr>
+          <p:cNvPr id="15" name="Text 13"/>
+          <p:cNvSpPr txBox="1"/>
+          <p:nvPr/>
+        </p:nvSpPr>
+        <p:spPr>
+          <a:xfrm>
+            <a:off x="8366760" y="2231136"/>
+            <a:ext cx="3017520" cy="1815612"/>
+          </a:xfrm>
+          <a:prstGeom prst="rect">
+            <a:avLst/>
+          </a:prstGeom>
+          <a:noFill/>
+          <a:ln/>
+        </p:spPr>
+        <p:txBody>
+          <a:bodyPr wrap="square" lIns="0" tIns="0" rIns="0" bIns="0" rtlCol="0" anchor="t"/>
+          <a:lstStyle/>
+          <a:p>
+            <a:pPr indent="0" marL="0">
+              <a:lnSpc>
+                <a:spcPct val="118000"/>
+              </a:lnSpc>
+              <a:buNone/>
+            </a:pPr>
+            <a:r>
+              <a:rPr lang="en-US" sz="1100" dirty="0">
+                <a:solidFill>
+                  <a:srgbClr val="101828"/>
+                </a:solidFill>
+                <a:latin typeface="IBM Plex Sans" pitchFamily="34" charset="0"/>
+                <a:ea typeface="IBM Plex Sans" pitchFamily="34" charset="-122"/>
+                <a:cs typeface="IBM Plex Sans" pitchFamily="34" charset="-120"/>
+              </a:rPr>
+              <a:t>Start: x = 10, nothing printed yet.</a:t>
+            </a:r>
+            <a:endParaRPr lang="en-US" sz="1100" dirty="0"/>
+          </a:p>
+          <a:p>
+            <a:pPr indent="0" marL="0">
+              <a:lnSpc>
+                <a:spcPct val="118000"/>
+              </a:lnSpc>
+              <a:buNone/>
+            </a:pPr>
+            <a:endParaRPr lang="en-US" sz="1100" dirty="0"/>
+          </a:p>
+          <a:p>
+            <a:pPr indent="0" marL="0">
+              <a:lnSpc>
+                <a:spcPct val="118000"/>
+              </a:lnSpc>
+              <a:buNone/>
+            </a:pPr>
+            <a:r>
+              <a:rPr lang="en-US" sz="1100" dirty="0">
+                <a:solidFill>
+                  <a:srgbClr val="101828"/>
+                </a:solidFill>
+                <a:latin typeface="IBM Plex Sans" pitchFamily="34" charset="0"/>
+                <a:ea typeface="IBM Plex Sans" pitchFamily="34" charset="-122"/>
+                <a:cs typeface="IBM Plex Sans" pitchFamily="34" charset="-120"/>
+              </a:rPr>
+              <a:t>Each pass: subtract 2, THEN print, so the printed value is the new one.</a:t>
+            </a:r>
+            <a:endParaRPr lang="en-US" sz="1100" dirty="0"/>
+          </a:p>
+          <a:p>
+            <a:pPr indent="0" marL="0">
+              <a:lnSpc>
+                <a:spcPct val="118000"/>
+              </a:lnSpc>
+              <a:buNone/>
+            </a:pPr>
+            <a:endParaRPr lang="en-US" sz="1100" dirty="0"/>
+          </a:p>
+          <a:p>
+            <a:pPr indent="0" marL="0">
+              <a:lnSpc>
+                <a:spcPct val="118000"/>
+              </a:lnSpc>
+              <a:buNone/>
+            </a:pPr>
+            <a:r>
+              <a:rPr lang="en-US" sz="1100" dirty="0">
+                <a:solidFill>
+                  <a:srgbClr val="101828"/>
+                </a:solidFill>
+                <a:latin typeface="IBM Plex Sans" pitchFamily="34" charset="0"/>
+                <a:ea typeface="IBM Plex Sans" pitchFamily="34" charset="-122"/>
+                <a:cs typeface="IBM Plex Sans" pitchFamily="34" charset="-120"/>
+              </a:rPr>
+              <a:t>Stop when the condition is false.</a:t>
+            </a:r>
+            <a:endParaRPr lang="en-US" sz="1100" dirty="0"/>
+          </a:p>
+        </p:txBody>
+      </p:sp>
+      <p:sp>
+        <p:nvSpPr>
+          <p:cNvPr id="16" name="Shape 14"/>
+          <p:cNvSpPr/>
+          <p:nvPr/>
+        </p:nvSpPr>
+        <p:spPr>
+          <a:xfrm>
+            <a:off x="502920" y="4330212"/>
+            <a:ext cx="11155680" cy="2006580"/>
+          </a:xfrm>
+          <a:prstGeom prst="roundRect">
+            <a:avLst>
+              <a:gd name="adj" fmla="val 5468"/>
+            </a:avLst>
+          </a:prstGeom>
+          <a:solidFill>
+            <a:srgbClr val="FFFFFF"/>
+          </a:solidFill>
+          <a:ln w="15875">
+            <a:solidFill>
+              <a:srgbClr val="08A6A6"/>
+            </a:solidFill>
+            <a:prstDash val="solid"/>
+          </a:ln>
+        </p:spPr>
+      </p:sp>
+      <p:sp>
+        <p:nvSpPr>
+          <p:cNvPr id="17" name="Text 15"/>
+          <p:cNvSpPr txBox="1"/>
+          <p:nvPr/>
+        </p:nvSpPr>
+        <p:spPr>
+          <a:xfrm>
+            <a:off x="868680" y="4494804"/>
+            <a:ext cx="10424160" cy="292608"/>
+          </a:xfrm>
+          <a:prstGeom prst="rect">
+            <a:avLst/>
+          </a:prstGeom>
+          <a:noFill/>
+          <a:ln/>
+        </p:spPr>
+        <p:txBody>
+          <a:bodyPr wrap="square" lIns="0" tIns="0" rIns="0" bIns="0" rtlCol="0" anchor="ctr"/>
+          <a:lstStyle/>
+          <a:p>
+            <a:pPr indent="0" marL="0">
+              <a:buNone/>
+            </a:pPr>
+            <a:r>
+              <a:rPr lang="en-US" sz="1100" b="1" dirty="0">
+                <a:solidFill>
+                  <a:srgbClr val="08A6A6"/>
+                </a:solidFill>
+                <a:latin typeface="IBM Plex Mono" pitchFamily="34" charset="0"/>
+                <a:ea typeface="IBM Plex Mono" pitchFamily="34" charset="-122"/>
+                <a:cs typeface="IBM Plex Mono" pitchFamily="34" charset="-120"/>
+              </a:rPr>
+              <a:t>THE FINISHED TABLE</a:t>
+            </a:r>
+            <a:endParaRPr lang="en-US" sz="1100" dirty="0"/>
+          </a:p>
+        </p:txBody>
+      </p:sp>
+      <p:sp>
+        <p:nvSpPr>
+          <p:cNvPr id="18" name="Text 16"/>
+          <p:cNvSpPr txBox="1"/>
+          <p:nvPr/>
+        </p:nvSpPr>
+        <p:spPr>
+          <a:xfrm>
+            <a:off x="868680" y="4842276"/>
+            <a:ext cx="10424160" cy="1384788"/>
+          </a:xfrm>
+          <a:prstGeom prst="rect">
+            <a:avLst/>
+          </a:prstGeom>
+          <a:noFill/>
+          <a:ln/>
+        </p:spPr>
+        <p:txBody>
+          <a:bodyPr wrap="square" lIns="0" tIns="0" rIns="0" bIns="0" rtlCol="0" anchor="t"/>
+          <a:lstStyle/>
+          <a:p>
+            <a:pPr indent="0" marL="0">
+              <a:lnSpc>
+                <a:spcPct val="120000"/>
+              </a:lnSpc>
+              <a:buNone/>
+            </a:pPr>
+            <a:r>
+              <a:rPr lang="en-US" sz="1300" dirty="0">
+                <a:solidFill>
+                  <a:srgbClr val="101828"/>
+                </a:solidFill>
+                <a:latin typeface="IBM Plex Sans" pitchFamily="34" charset="0"/>
+                <a:ea typeface="IBM Plex Sans" pitchFamily="34" charset="-122"/>
+                <a:cs typeface="IBM Plex Sans" pitchFamily="34" charset="-120"/>
+              </a:rPr>
+              <a:t>x      Output</a:t>
+            </a:r>
+            <a:endParaRPr lang="en-US" sz="1300" dirty="0"/>
+          </a:p>
+          <a:p>
+            <a:pPr indent="0" marL="0">
+              <a:lnSpc>
+                <a:spcPct val="120000"/>
+              </a:lnSpc>
+              <a:buNone/>
+            </a:pPr>
+            <a:r>
+              <a:rPr lang="en-US" sz="1300" dirty="0">
+                <a:solidFill>
+                  <a:srgbClr val="101828"/>
+                </a:solidFill>
+                <a:latin typeface="IBM Plex Sans" pitchFamily="34" charset="0"/>
+                <a:ea typeface="IBM Plex Sans" pitchFamily="34" charset="-122"/>
+                <a:cs typeface="IBM Plex Sans" pitchFamily="34" charset="-120"/>
+              </a:rPr>
+              <a:t>10       -</a:t>
+            </a:r>
+            <a:endParaRPr lang="en-US" sz="1300" dirty="0"/>
+          </a:p>
+          <a:p>
+            <a:pPr indent="0" marL="0">
+              <a:lnSpc>
+                <a:spcPct val="120000"/>
+              </a:lnSpc>
+              <a:buNone/>
+            </a:pPr>
+            <a:r>
+              <a:rPr lang="en-US" sz="1300" dirty="0">
+                <a:solidFill>
+                  <a:srgbClr val="101828"/>
+                </a:solidFill>
+                <a:latin typeface="IBM Plex Sans" pitchFamily="34" charset="0"/>
+                <a:ea typeface="IBM Plex Sans" pitchFamily="34" charset="-122"/>
+                <a:cs typeface="IBM Plex Sans" pitchFamily="34" charset="-120"/>
+              </a:rPr>
+              <a:t> 8       8</a:t>
+            </a:r>
+            <a:endParaRPr lang="en-US" sz="1300" dirty="0"/>
+          </a:p>
+          <a:p>
+            <a:pPr indent="0" marL="0">
+              <a:lnSpc>
+                <a:spcPct val="120000"/>
+              </a:lnSpc>
+              <a:buNone/>
+            </a:pPr>
+            <a:r>
+              <a:rPr lang="en-US" sz="1300" dirty="0">
+                <a:solidFill>
+                  <a:srgbClr val="101828"/>
+                </a:solidFill>
+                <a:latin typeface="IBM Plex Sans" pitchFamily="34" charset="0"/>
+                <a:ea typeface="IBM Plex Sans" pitchFamily="34" charset="-122"/>
+                <a:cs typeface="IBM Plex Sans" pitchFamily="34" charset="-120"/>
+              </a:rPr>
+              <a:t> 6       6</a:t>
+            </a:r>
+            <a:endParaRPr lang="en-US" sz="1300" dirty="0"/>
+          </a:p>
+          <a:p>
+            <a:pPr indent="0" marL="0">
+              <a:lnSpc>
+                <a:spcPct val="120000"/>
+              </a:lnSpc>
+              <a:buNone/>
+            </a:pPr>
+            <a:r>
+              <a:rPr lang="en-US" sz="1300" dirty="0">
+                <a:solidFill>
+                  <a:srgbClr val="101828"/>
+                </a:solidFill>
+                <a:latin typeface="IBM Plex Sans" pitchFamily="34" charset="0"/>
+                <a:ea typeface="IBM Plex Sans" pitchFamily="34" charset="-122"/>
+                <a:cs typeface="IBM Plex Sans" pitchFamily="34" charset="-120"/>
+              </a:rPr>
+              <a:t> 4       4</a:t>
+            </a:r>
+            <a:endParaRPr lang="en-US" sz="1300" dirty="0"/>
+          </a:p>
+          <a:p>
+            <a:pPr indent="0" marL="0">
+              <a:lnSpc>
+                <a:spcPct val="120000"/>
+              </a:lnSpc>
+              <a:buNone/>
+            </a:pPr>
+            <a:r>
+              <a:rPr lang="en-US" sz="1300" dirty="0">
+                <a:solidFill>
+                  <a:srgbClr val="101828"/>
+                </a:solidFill>
+                <a:latin typeface="IBM Plex Sans" pitchFamily="34" charset="0"/>
+                <a:ea typeface="IBM Plex Sans" pitchFamily="34" charset="-122"/>
+                <a:cs typeface="IBM Plex Sans" pitchFamily="34" charset="-120"/>
+              </a:rPr>
+              <a:t> 2       2</a:t>
+            </a:r>
+            <a:endParaRPr lang="en-US" sz="1300" dirty="0"/>
           </a:p>
         </p:txBody>
       </p:sp>
@@ -3281,14 +4066,75 @@
       </p:sp>
       <p:sp>
         <p:nvSpPr>
-          <p:cNvPr id="5" name="Text 3"/>
-          <p:cNvSpPr txBox="1"/>
-          <p:nvPr/>
-        </p:nvSpPr>
-        <p:spPr>
-          <a:xfrm>
-            <a:off x="502920" y="411480"/>
-            <a:ext cx="11155680" cy="777240"/>
+          <p:cNvPr id="5" name="Shape 3"/>
+          <p:cNvSpPr/>
+          <p:nvPr/>
+        </p:nvSpPr>
+        <p:spPr>
+          <a:xfrm>
+            <a:off x="502920" y="457200"/>
+            <a:ext cx="1051560" cy="420624"/>
+          </a:xfrm>
+          <a:prstGeom prst="roundRect">
+            <a:avLst>
+              <a:gd name="adj" fmla="val 21739"/>
+            </a:avLst>
+          </a:prstGeom>
+          <a:solidFill>
+            <a:srgbClr val="F4B942"/>
+          </a:solidFill>
+          <a:ln/>
+        </p:spPr>
+      </p:sp>
+      <p:sp>
+        <p:nvSpPr>
+          <p:cNvPr id="6" name="Text 4"/>
+          <p:cNvSpPr txBox="1"/>
+          <p:nvPr/>
+        </p:nvSpPr>
+        <p:spPr>
+          <a:xfrm>
+            <a:off x="502920" y="457200"/>
+            <a:ext cx="1051560" cy="420624"/>
+          </a:xfrm>
+          <a:prstGeom prst="rect">
+            <a:avLst/>
+          </a:prstGeom>
+          <a:noFill/>
+          <a:ln/>
+        </p:spPr>
+        <p:txBody>
+          <a:bodyPr wrap="square" lIns="0" tIns="0" rIns="0" bIns="0" rtlCol="0" anchor="ctr"/>
+          <a:lstStyle/>
+          <a:p>
+            <a:pPr algn="ctr" indent="0" marL="0">
+              <a:buNone/>
+            </a:pPr>
+            <a:r>
+              <a:rPr lang="en-US" sz="1200" b="1" dirty="0">
+                <a:solidFill>
+                  <a:srgbClr val="101828"/>
+                </a:solidFill>
+                <a:latin typeface="IBM Plex Mono" pitchFamily="34" charset="0"/>
+                <a:ea typeface="IBM Plex Mono" pitchFamily="34" charset="-122"/>
+                <a:cs typeface="IBM Plex Mono" pitchFamily="34" charset="-120"/>
+              </a:rPr>
+              <a:t>CHECK</a:t>
+            </a:r>
+            <a:endParaRPr lang="en-US" sz="1200" dirty="0"/>
+          </a:p>
+        </p:txBody>
+      </p:sp>
+      <p:sp>
+        <p:nvSpPr>
+          <p:cNvPr id="7" name="Text 5"/>
+          <p:cNvSpPr txBox="1"/>
+          <p:nvPr/>
+        </p:nvSpPr>
+        <p:spPr>
+          <a:xfrm>
+            <a:off x="1737360" y="457200"/>
+            <a:ext cx="9875520" cy="420624"/>
           </a:xfrm>
           <a:prstGeom prst="rect">
             <a:avLst/>
@@ -3304,30 +4150,30 @@
               <a:buNone/>
             </a:pPr>
             <a:r>
-              <a:rPr lang="en-US" sz="3200" b="1" dirty="0">
-                <a:solidFill>
-                  <a:srgbClr val="101828"/>
+              <a:rPr lang="en-US" sz="1500" dirty="0">
+                <a:solidFill>
+                  <a:srgbClr val="667085"/>
                 </a:solidFill>
                 <a:latin typeface="IBM Plex Sans" pitchFamily="34" charset="0"/>
                 <a:ea typeface="IBM Plex Sans" pitchFamily="34" charset="-122"/>
                 <a:cs typeface="IBM Plex Sans" pitchFamily="34" charset="-120"/>
               </a:rPr>
-              <a:t>Worth knowing</a:t>
-            </a:r>
-            <a:endParaRPr lang="en-US" sz="3200" dirty="0"/>
-          </a:p>
-        </p:txBody>
-      </p:sp>
-      <p:sp>
-        <p:nvSpPr>
-          <p:cNvPr id="6" name="Text 4"/>
-          <p:cNvSpPr txBox="1"/>
-          <p:nvPr/>
-        </p:nvSpPr>
-        <p:spPr>
-          <a:xfrm>
-            <a:off x="502920" y="1170432"/>
-            <a:ext cx="11155680" cy="411480"/>
+              <a:t>Hands down. Everyone commits.</a:t>
+            </a:r>
+            <a:endParaRPr lang="en-US" sz="1500" dirty="0"/>
+          </a:p>
+        </p:txBody>
+      </p:sp>
+      <p:sp>
+        <p:nvSpPr>
+          <p:cNvPr id="8" name="Text 6"/>
+          <p:cNvSpPr txBox="1"/>
+          <p:nvPr/>
+        </p:nvSpPr>
+        <p:spPr>
+          <a:xfrm>
+            <a:off x="502920" y="1097280"/>
+            <a:ext cx="11155680" cy="914400"/>
           </a:xfrm>
           <a:prstGeom prst="rect">
             <a:avLst/>
@@ -3340,37 +4186,40 @@
           <a:lstStyle/>
           <a:p>
             <a:pPr indent="0" marL="0">
-              <a:buNone/>
-            </a:pPr>
-            <a:r>
-              <a:rPr lang="en-US" sz="1500" dirty="0">
-                <a:solidFill>
-                  <a:srgbClr val="667085"/>
+              <a:lnSpc>
+                <a:spcPct val="115000"/>
+              </a:lnSpc>
+              <a:buNone/>
+            </a:pPr>
+            <a:r>
+              <a:rPr lang="en-US" sz="2600" b="1" dirty="0">
+                <a:solidFill>
+                  <a:srgbClr val="101828"/>
                 </a:solidFill>
                 <a:latin typeface="IBM Plex Sans" pitchFamily="34" charset="0"/>
                 <a:ea typeface="IBM Plex Sans" pitchFamily="34" charset="-122"/>
                 <a:cs typeface="IBM Plex Sans" pitchFamily="34" charset="-120"/>
               </a:rPr>
-              <a:t>The information markers dotted around the room</a:t>
-            </a:r>
-            <a:endParaRPr lang="en-US" sz="1500" dirty="0"/>
-          </a:p>
-        </p:txBody>
-      </p:sp>
-      <p:sp>
-        <p:nvSpPr>
-          <p:cNvPr id="7" name="Shape 5"/>
+              <a:t>A while loop's condition is false the first time it is tested. How many rows does the loop add?</a:t>
+            </a:r>
+            <a:endParaRPr lang="en-US" sz="2600" dirty="0"/>
+          </a:p>
+        </p:txBody>
+      </p:sp>
+      <p:sp>
+        <p:nvSpPr>
+          <p:cNvPr id="9" name="Shape 7"/>
           <p:cNvSpPr/>
           <p:nvPr/>
         </p:nvSpPr>
         <p:spPr>
           <a:xfrm>
-            <a:off x="502920" y="1828800"/>
-            <a:ext cx="5394960" cy="1737360"/>
+            <a:off x="502920" y="2148840"/>
+            <a:ext cx="11155680" cy="731520"/>
           </a:xfrm>
           <a:prstGeom prst="roundRect">
             <a:avLst>
-              <a:gd name="adj" fmla="val 6316"/>
+              <a:gd name="adj" fmla="val 15000"/>
             </a:avLst>
           </a:prstGeom>
           <a:solidFill>
@@ -3378,7 +4227,7 @@
           </a:solidFill>
           <a:ln w="15875">
             <a:solidFill>
-              <a:srgbClr val="2D63FF"/>
+              <a:srgbClr val="D9DEE7"/>
             </a:solidFill>
             <a:prstDash val="solid"/>
           </a:ln>
@@ -3386,14 +4235,75 @@
       </p:sp>
       <p:sp>
         <p:nvSpPr>
-          <p:cNvPr id="8" name="Text 6"/>
-          <p:cNvSpPr txBox="1"/>
-          <p:nvPr/>
-        </p:nvSpPr>
-        <p:spPr>
-          <a:xfrm>
-            <a:off x="822960" y="2011680"/>
-            <a:ext cx="4754880" cy="365760"/>
+          <p:cNvPr id="10" name="Shape 8"/>
+          <p:cNvSpPr/>
+          <p:nvPr/>
+        </p:nvSpPr>
+        <p:spPr>
+          <a:xfrm>
+            <a:off x="777240" y="2295144"/>
+            <a:ext cx="438912" cy="438912"/>
+          </a:xfrm>
+          <a:prstGeom prst="roundRect">
+            <a:avLst>
+              <a:gd name="adj" fmla="val 20833"/>
+            </a:avLst>
+          </a:prstGeom>
+          <a:solidFill>
+            <a:srgbClr val="EEF2FB"/>
+          </a:solidFill>
+          <a:ln/>
+        </p:spPr>
+      </p:sp>
+      <p:sp>
+        <p:nvSpPr>
+          <p:cNvPr id="11" name="Text 9"/>
+          <p:cNvSpPr txBox="1"/>
+          <p:nvPr/>
+        </p:nvSpPr>
+        <p:spPr>
+          <a:xfrm>
+            <a:off x="777240" y="2295144"/>
+            <a:ext cx="438912" cy="438912"/>
+          </a:xfrm>
+          <a:prstGeom prst="rect">
+            <a:avLst/>
+          </a:prstGeom>
+          <a:noFill/>
+          <a:ln/>
+        </p:spPr>
+        <p:txBody>
+          <a:bodyPr wrap="square" lIns="0" tIns="0" rIns="0" bIns="0" rtlCol="0" anchor="ctr"/>
+          <a:lstStyle/>
+          <a:p>
+            <a:pPr algn="ctr" indent="0" marL="0">
+              <a:buNone/>
+            </a:pPr>
+            <a:r>
+              <a:rPr lang="en-US" sz="1300" b="1" dirty="0">
+                <a:solidFill>
+                  <a:srgbClr val="2D63FF"/>
+                </a:solidFill>
+                <a:latin typeface="IBM Plex Mono" pitchFamily="34" charset="0"/>
+                <a:ea typeface="IBM Plex Mono" pitchFamily="34" charset="-122"/>
+                <a:cs typeface="IBM Plex Mono" pitchFamily="34" charset="-120"/>
+              </a:rPr>
+              <a:t>A</a:t>
+            </a:r>
+            <a:endParaRPr lang="en-US" sz="1300" dirty="0"/>
+          </a:p>
+        </p:txBody>
+      </p:sp>
+      <p:sp>
+        <p:nvSpPr>
+          <p:cNvPr id="12" name="Text 10"/>
+          <p:cNvSpPr txBox="1"/>
+          <p:nvPr/>
+        </p:nvSpPr>
+        <p:spPr>
+          <a:xfrm>
+            <a:off x="1417320" y="2148840"/>
+            <a:ext cx="10058400" cy="731520"/>
           </a:xfrm>
           <a:prstGeom prst="rect">
             <a:avLst/>
@@ -3406,79 +4316,40 @@
           <a:lstStyle/>
           <a:p>
             <a:pPr indent="0" marL="0">
-              <a:buNone/>
-            </a:pPr>
-            <a:r>
-              <a:rPr lang="en-US" sz="1600" b="1" dirty="0">
-                <a:solidFill>
-                  <a:srgbClr val="2D63FF"/>
+              <a:lnSpc>
+                <a:spcPct val="115000"/>
+              </a:lnSpc>
+              <a:buNone/>
+            </a:pPr>
+            <a:r>
+              <a:rPr lang="en-US" sz="1700" dirty="0">
+                <a:solidFill>
+                  <a:srgbClr val="101828"/>
                 </a:solidFill>
                 <a:latin typeface="IBM Plex Sans" pitchFamily="34" charset="0"/>
                 <a:ea typeface="IBM Plex Sans" pitchFamily="34" charset="-122"/>
                 <a:cs typeface="IBM Plex Sans" pitchFamily="34" charset="-120"/>
               </a:rPr>
-              <a:t>Also called a dry run</a:t>
-            </a:r>
-            <a:endParaRPr lang="en-US" sz="1600" dirty="0"/>
-          </a:p>
-        </p:txBody>
-      </p:sp>
-      <p:sp>
-        <p:nvSpPr>
-          <p:cNvPr id="9" name="Text 7"/>
-          <p:cNvSpPr txBox="1"/>
-          <p:nvPr/>
-        </p:nvSpPr>
-        <p:spPr>
-          <a:xfrm>
-            <a:off x="822960" y="2395728"/>
-            <a:ext cx="4754880" cy="1005840"/>
-          </a:xfrm>
-          <a:prstGeom prst="rect">
-            <a:avLst/>
-          </a:prstGeom>
-          <a:noFill/>
-          <a:ln/>
-        </p:spPr>
-        <p:txBody>
-          <a:bodyPr wrap="square" lIns="0" tIns="0" rIns="0" bIns="0" rtlCol="0" anchor="t"/>
-          <a:lstStyle/>
-          <a:p>
-            <a:pPr indent="0" marL="0">
-              <a:lnSpc>
-                <a:spcPct val="120000"/>
-              </a:lnSpc>
-              <a:buNone/>
-            </a:pPr>
-            <a:r>
-              <a:rPr lang="en-US" sz="1300" dirty="0">
-                <a:solidFill>
-                  <a:srgbClr val="667085"/>
-                </a:solidFill>
-                <a:latin typeface="IBM Plex Sans" pitchFamily="34" charset="0"/>
-                <a:ea typeface="IBM Plex Sans" pitchFamily="34" charset="-122"/>
-                <a:cs typeface="IBM Plex Sans" pitchFamily="34" charset="-120"/>
-              </a:rPr>
-              <a:t>Running a program in your head with pen and paper is a dry run; the trace table is where you write it down.</a:t>
-            </a:r>
-            <a:endParaRPr lang="en-US" sz="1300" dirty="0"/>
-          </a:p>
-        </p:txBody>
-      </p:sp>
-      <p:sp>
-        <p:nvSpPr>
-          <p:cNvPr id="10" name="Shape 8"/>
+              <a:t>None: the body never runs</a:t>
+            </a:r>
+            <a:endParaRPr lang="en-US" sz="1700" dirty="0"/>
+          </a:p>
+        </p:txBody>
+      </p:sp>
+      <p:sp>
+        <p:nvSpPr>
+          <p:cNvPr id="13" name="Shape 11"/>
           <p:cNvSpPr/>
           <p:nvPr/>
         </p:nvSpPr>
         <p:spPr>
           <a:xfrm>
-            <a:off x="6217920" y="1828800"/>
-            <a:ext cx="5394960" cy="1737360"/>
+            <a:off x="502920" y="3017520"/>
+            <a:ext cx="11155680" cy="731520"/>
           </a:xfrm>
           <a:prstGeom prst="roundRect">
             <a:avLst>
-              <a:gd name="adj" fmla="val 6316"/>
+              <a:gd name="adj" fmla="val 15000"/>
             </a:avLst>
           </a:prstGeom>
           <a:solidFill>
@@ -3486,7 +4357,7 @@
           </a:solidFill>
           <a:ln w="15875">
             <a:solidFill>
-              <a:srgbClr val="08A6A6"/>
+              <a:srgbClr val="D9DEE7"/>
             </a:solidFill>
             <a:prstDash val="solid"/>
           </a:ln>
@@ -3494,14 +4365,75 @@
       </p:sp>
       <p:sp>
         <p:nvSpPr>
-          <p:cNvPr id="11" name="Text 9"/>
-          <p:cNvSpPr txBox="1"/>
-          <p:nvPr/>
-        </p:nvSpPr>
-        <p:spPr>
-          <a:xfrm>
-            <a:off x="6537960" y="2011680"/>
-            <a:ext cx="4754880" cy="365760"/>
+          <p:cNvPr id="14" name="Shape 12"/>
+          <p:cNvSpPr/>
+          <p:nvPr/>
+        </p:nvSpPr>
+        <p:spPr>
+          <a:xfrm>
+            <a:off x="777240" y="3163824"/>
+            <a:ext cx="438912" cy="438912"/>
+          </a:xfrm>
+          <a:prstGeom prst="roundRect">
+            <a:avLst>
+              <a:gd name="adj" fmla="val 20833"/>
+            </a:avLst>
+          </a:prstGeom>
+          <a:solidFill>
+            <a:srgbClr val="EEF2FB"/>
+          </a:solidFill>
+          <a:ln/>
+        </p:spPr>
+      </p:sp>
+      <p:sp>
+        <p:nvSpPr>
+          <p:cNvPr id="15" name="Text 13"/>
+          <p:cNvSpPr txBox="1"/>
+          <p:nvPr/>
+        </p:nvSpPr>
+        <p:spPr>
+          <a:xfrm>
+            <a:off x="777240" y="3163824"/>
+            <a:ext cx="438912" cy="438912"/>
+          </a:xfrm>
+          <a:prstGeom prst="rect">
+            <a:avLst/>
+          </a:prstGeom>
+          <a:noFill/>
+          <a:ln/>
+        </p:spPr>
+        <p:txBody>
+          <a:bodyPr wrap="square" lIns="0" tIns="0" rIns="0" bIns="0" rtlCol="0" anchor="ctr"/>
+          <a:lstStyle/>
+          <a:p>
+            <a:pPr algn="ctr" indent="0" marL="0">
+              <a:buNone/>
+            </a:pPr>
+            <a:r>
+              <a:rPr lang="en-US" sz="1300" b="1" dirty="0">
+                <a:solidFill>
+                  <a:srgbClr val="2D63FF"/>
+                </a:solidFill>
+                <a:latin typeface="IBM Plex Mono" pitchFamily="34" charset="0"/>
+                <a:ea typeface="IBM Plex Mono" pitchFamily="34" charset="-122"/>
+                <a:cs typeface="IBM Plex Mono" pitchFamily="34" charset="-120"/>
+              </a:rPr>
+              <a:t>B</a:t>
+            </a:r>
+            <a:endParaRPr lang="en-US" sz="1300" dirty="0"/>
+          </a:p>
+        </p:txBody>
+      </p:sp>
+      <p:sp>
+        <p:nvSpPr>
+          <p:cNvPr id="16" name="Text 14"/>
+          <p:cNvSpPr txBox="1"/>
+          <p:nvPr/>
+        </p:nvSpPr>
+        <p:spPr>
+          <a:xfrm>
+            <a:off x="1417320" y="3017520"/>
+            <a:ext cx="10058400" cy="731520"/>
           </a:xfrm>
           <a:prstGeom prst="rect">
             <a:avLst/>
@@ -3514,79 +4446,40 @@
           <a:lstStyle/>
           <a:p>
             <a:pPr indent="0" marL="0">
-              <a:buNone/>
-            </a:pPr>
-            <a:r>
-              <a:rPr lang="en-US" sz="1600" b="1" dirty="0">
-                <a:solidFill>
-                  <a:srgbClr val="08A6A6"/>
+              <a:lnSpc>
+                <a:spcPct val="115000"/>
+              </a:lnSpc>
+              <a:buNone/>
+            </a:pPr>
+            <a:r>
+              <a:rPr lang="en-US" sz="1700" dirty="0">
+                <a:solidFill>
+                  <a:srgbClr val="101828"/>
                 </a:solidFill>
                 <a:latin typeface="IBM Plex Sans" pitchFamily="34" charset="0"/>
                 <a:ea typeface="IBM Plex Sans" pitchFamily="34" charset="-122"/>
                 <a:cs typeface="IBM Plex Sans" pitchFamily="34" charset="-120"/>
               </a:rPr>
-              <a:t>Before debuggers</a:t>
-            </a:r>
-            <a:endParaRPr lang="en-US" sz="1600" dirty="0"/>
-          </a:p>
-        </p:txBody>
-      </p:sp>
-      <p:sp>
-        <p:nvSpPr>
-          <p:cNvPr id="12" name="Text 10"/>
-          <p:cNvSpPr txBox="1"/>
-          <p:nvPr/>
-        </p:nvSpPr>
-        <p:spPr>
-          <a:xfrm>
-            <a:off x="6537960" y="2395728"/>
-            <a:ext cx="4754880" cy="1005840"/>
-          </a:xfrm>
-          <a:prstGeom prst="rect">
-            <a:avLst/>
-          </a:prstGeom>
-          <a:noFill/>
-          <a:ln/>
-        </p:spPr>
-        <p:txBody>
-          <a:bodyPr wrap="square" lIns="0" tIns="0" rIns="0" bIns="0" rtlCol="0" anchor="t"/>
-          <a:lstStyle/>
-          <a:p>
-            <a:pPr indent="0" marL="0">
-              <a:lnSpc>
-                <a:spcPct val="120000"/>
-              </a:lnSpc>
-              <a:buNone/>
-            </a:pPr>
-            <a:r>
-              <a:rPr lang="en-US" sz="1300" dirty="0">
-                <a:solidFill>
-                  <a:srgbClr val="667085"/>
-                </a:solidFill>
-                <a:latin typeface="IBM Plex Sans" pitchFamily="34" charset="0"/>
-                <a:ea typeface="IBM Plex Sans" pitchFamily="34" charset="-122"/>
-                <a:cs typeface="IBM Plex Sans" pitchFamily="34" charset="-120"/>
-              </a:rPr>
-              <a:t>Early programmers had no way to inspect a running program, so tracing by hand was the only debugging technique there was.</a:t>
-            </a:r>
-            <a:endParaRPr lang="en-US" sz="1300" dirty="0"/>
-          </a:p>
-        </p:txBody>
-      </p:sp>
-      <p:sp>
-        <p:nvSpPr>
-          <p:cNvPr id="13" name="Shape 11"/>
+              <a:t>One</a:t>
+            </a:r>
+            <a:endParaRPr lang="en-US" sz="1700" dirty="0"/>
+          </a:p>
+        </p:txBody>
+      </p:sp>
+      <p:sp>
+        <p:nvSpPr>
+          <p:cNvPr id="17" name="Shape 15"/>
           <p:cNvSpPr/>
           <p:nvPr/>
         </p:nvSpPr>
         <p:spPr>
           <a:xfrm>
-            <a:off x="502920" y="3794760"/>
-            <a:ext cx="5394960" cy="1737360"/>
+            <a:off x="502920" y="3886200"/>
+            <a:ext cx="11155680" cy="731520"/>
           </a:xfrm>
           <a:prstGeom prst="roundRect">
             <a:avLst>
-              <a:gd name="adj" fmla="val 6316"/>
+              <a:gd name="adj" fmla="val 15000"/>
             </a:avLst>
           </a:prstGeom>
           <a:solidFill>
@@ -3594,7 +4487,7 @@
           </a:solidFill>
           <a:ln w="15875">
             <a:solidFill>
-              <a:srgbClr val="2D63FF"/>
+              <a:srgbClr val="D9DEE7"/>
             </a:solidFill>
             <a:prstDash val="solid"/>
           </a:ln>
@@ -3602,14 +4495,75 @@
       </p:sp>
       <p:sp>
         <p:nvSpPr>
-          <p:cNvPr id="14" name="Text 12"/>
-          <p:cNvSpPr txBox="1"/>
-          <p:nvPr/>
-        </p:nvSpPr>
-        <p:spPr>
-          <a:xfrm>
-            <a:off x="822960" y="3977640"/>
-            <a:ext cx="4754880" cy="365760"/>
+          <p:cNvPr id="18" name="Shape 16"/>
+          <p:cNvSpPr/>
+          <p:nvPr/>
+        </p:nvSpPr>
+        <p:spPr>
+          <a:xfrm>
+            <a:off x="777240" y="4032504"/>
+            <a:ext cx="438912" cy="438912"/>
+          </a:xfrm>
+          <a:prstGeom prst="roundRect">
+            <a:avLst>
+              <a:gd name="adj" fmla="val 20833"/>
+            </a:avLst>
+          </a:prstGeom>
+          <a:solidFill>
+            <a:srgbClr val="EEF2FB"/>
+          </a:solidFill>
+          <a:ln/>
+        </p:spPr>
+      </p:sp>
+      <p:sp>
+        <p:nvSpPr>
+          <p:cNvPr id="19" name="Text 17"/>
+          <p:cNvSpPr txBox="1"/>
+          <p:nvPr/>
+        </p:nvSpPr>
+        <p:spPr>
+          <a:xfrm>
+            <a:off x="777240" y="4032504"/>
+            <a:ext cx="438912" cy="438912"/>
+          </a:xfrm>
+          <a:prstGeom prst="rect">
+            <a:avLst/>
+          </a:prstGeom>
+          <a:noFill/>
+          <a:ln/>
+        </p:spPr>
+        <p:txBody>
+          <a:bodyPr wrap="square" lIns="0" tIns="0" rIns="0" bIns="0" rtlCol="0" anchor="ctr"/>
+          <a:lstStyle/>
+          <a:p>
+            <a:pPr algn="ctr" indent="0" marL="0">
+              <a:buNone/>
+            </a:pPr>
+            <a:r>
+              <a:rPr lang="en-US" sz="1300" b="1" dirty="0">
+                <a:solidFill>
+                  <a:srgbClr val="2D63FF"/>
+                </a:solidFill>
+                <a:latin typeface="IBM Plex Mono" pitchFamily="34" charset="0"/>
+                <a:ea typeface="IBM Plex Mono" pitchFamily="34" charset="-122"/>
+                <a:cs typeface="IBM Plex Mono" pitchFamily="34" charset="-120"/>
+              </a:rPr>
+              <a:t>C</a:t>
+            </a:r>
+            <a:endParaRPr lang="en-US" sz="1300" dirty="0"/>
+          </a:p>
+        </p:txBody>
+      </p:sp>
+      <p:sp>
+        <p:nvSpPr>
+          <p:cNvPr id="20" name="Text 18"/>
+          <p:cNvSpPr txBox="1"/>
+          <p:nvPr/>
+        </p:nvSpPr>
+        <p:spPr>
+          <a:xfrm>
+            <a:off x="1417320" y="3886200"/>
+            <a:ext cx="10058400" cy="731520"/>
           </a:xfrm>
           <a:prstGeom prst="rect">
             <a:avLst/>
@@ -3622,79 +4576,40 @@
           <a:lstStyle/>
           <a:p>
             <a:pPr indent="0" marL="0">
-              <a:buNone/>
-            </a:pPr>
-            <a:r>
-              <a:rPr lang="en-US" sz="1600" b="1" dirty="0">
-                <a:solidFill>
-                  <a:srgbClr val="2D63FF"/>
+              <a:lnSpc>
+                <a:spcPct val="115000"/>
+              </a:lnSpc>
+              <a:buNone/>
+            </a:pPr>
+            <a:r>
+              <a:rPr lang="en-US" sz="1700" dirty="0">
+                <a:solidFill>
+                  <a:srgbClr val="101828"/>
                 </a:solidFill>
                 <a:latin typeface="IBM Plex Sans" pitchFamily="34" charset="0"/>
                 <a:ea typeface="IBM Plex Sans" pitchFamily="34" charset="-122"/>
                 <a:cs typeface="IBM Plex Sans" pitchFamily="34" charset="-120"/>
               </a:rPr>
-              <a:t>Still used</a:t>
-            </a:r>
-            <a:endParaRPr lang="en-US" sz="1600" dirty="0"/>
-          </a:p>
-        </p:txBody>
-      </p:sp>
-      <p:sp>
-        <p:nvSpPr>
-          <p:cNvPr id="15" name="Text 13"/>
-          <p:cNvSpPr txBox="1"/>
-          <p:nvPr/>
-        </p:nvSpPr>
-        <p:spPr>
-          <a:xfrm>
-            <a:off x="822960" y="4361688"/>
-            <a:ext cx="4754880" cy="1005840"/>
-          </a:xfrm>
-          <a:prstGeom prst="rect">
-            <a:avLst/>
-          </a:prstGeom>
-          <a:noFill/>
-          <a:ln/>
-        </p:spPr>
-        <p:txBody>
-          <a:bodyPr wrap="square" lIns="0" tIns="0" rIns="0" bIns="0" rtlCol="0" anchor="t"/>
-          <a:lstStyle/>
-          <a:p>
-            <a:pPr indent="0" marL="0">
-              <a:lnSpc>
-                <a:spcPct val="120000"/>
-              </a:lnSpc>
-              <a:buNone/>
-            </a:pPr>
-            <a:r>
-              <a:rPr lang="en-US" sz="1300" dirty="0">
-                <a:solidFill>
-                  <a:srgbClr val="667085"/>
-                </a:solidFill>
-                <a:latin typeface="IBM Plex Sans" pitchFamily="34" charset="0"/>
-                <a:ea typeface="IBM Plex Sans" pitchFamily="34" charset="-122"/>
-                <a:cs typeface="IBM Plex Sans" pitchFamily="34" charset="-120"/>
-              </a:rPr>
-              <a:t>Professional programmers still trace tricky loops by hand, because a debugger shows what happens and a trace shows why.</a:t>
-            </a:r>
-            <a:endParaRPr lang="en-US" sz="1300" dirty="0"/>
-          </a:p>
-        </p:txBody>
-      </p:sp>
-      <p:sp>
-        <p:nvSpPr>
-          <p:cNvPr id="16" name="Shape 14"/>
+              <a:t>As many as the list</a:t>
+            </a:r>
+            <a:endParaRPr lang="en-US" sz="1700" dirty="0"/>
+          </a:p>
+        </p:txBody>
+      </p:sp>
+      <p:sp>
+        <p:nvSpPr>
+          <p:cNvPr id="21" name="Shape 19"/>
           <p:cNvSpPr/>
           <p:nvPr/>
         </p:nvSpPr>
         <p:spPr>
           <a:xfrm>
-            <a:off x="6217920" y="3794760"/>
-            <a:ext cx="5394960" cy="1737360"/>
+            <a:off x="502920" y="4754880"/>
+            <a:ext cx="11155680" cy="731520"/>
           </a:xfrm>
           <a:prstGeom prst="roundRect">
             <a:avLst>
-              <a:gd name="adj" fmla="val 6316"/>
+              <a:gd name="adj" fmla="val 15000"/>
             </a:avLst>
           </a:prstGeom>
           <a:solidFill>
@@ -3702,7 +4617,7 @@
           </a:solidFill>
           <a:ln w="15875">
             <a:solidFill>
-              <a:srgbClr val="08A6A6"/>
+              <a:srgbClr val="D9DEE7"/>
             </a:solidFill>
             <a:prstDash val="solid"/>
           </a:ln>
@@ -3710,14 +4625,75 @@
       </p:sp>
       <p:sp>
         <p:nvSpPr>
-          <p:cNvPr id="17" name="Text 15"/>
-          <p:cNvSpPr txBox="1"/>
-          <p:nvPr/>
-        </p:nvSpPr>
-        <p:spPr>
-          <a:xfrm>
-            <a:off x="6537960" y="3977640"/>
-            <a:ext cx="4754880" cy="365760"/>
+          <p:cNvPr id="22" name="Shape 20"/>
+          <p:cNvSpPr/>
+          <p:nvPr/>
+        </p:nvSpPr>
+        <p:spPr>
+          <a:xfrm>
+            <a:off x="777240" y="4901184"/>
+            <a:ext cx="438912" cy="438912"/>
+          </a:xfrm>
+          <a:prstGeom prst="roundRect">
+            <a:avLst>
+              <a:gd name="adj" fmla="val 20833"/>
+            </a:avLst>
+          </a:prstGeom>
+          <a:solidFill>
+            <a:srgbClr val="EEF2FB"/>
+          </a:solidFill>
+          <a:ln/>
+        </p:spPr>
+      </p:sp>
+      <p:sp>
+        <p:nvSpPr>
+          <p:cNvPr id="23" name="Text 21"/>
+          <p:cNvSpPr txBox="1"/>
+          <p:nvPr/>
+        </p:nvSpPr>
+        <p:spPr>
+          <a:xfrm>
+            <a:off x="777240" y="4901184"/>
+            <a:ext cx="438912" cy="438912"/>
+          </a:xfrm>
+          <a:prstGeom prst="rect">
+            <a:avLst/>
+          </a:prstGeom>
+          <a:noFill/>
+          <a:ln/>
+        </p:spPr>
+        <p:txBody>
+          <a:bodyPr wrap="square" lIns="0" tIns="0" rIns="0" bIns="0" rtlCol="0" anchor="ctr"/>
+          <a:lstStyle/>
+          <a:p>
+            <a:pPr algn="ctr" indent="0" marL="0">
+              <a:buNone/>
+            </a:pPr>
+            <a:r>
+              <a:rPr lang="en-US" sz="1300" b="1" dirty="0">
+                <a:solidFill>
+                  <a:srgbClr val="2D63FF"/>
+                </a:solidFill>
+                <a:latin typeface="IBM Plex Mono" pitchFamily="34" charset="0"/>
+                <a:ea typeface="IBM Plex Mono" pitchFamily="34" charset="-122"/>
+                <a:cs typeface="IBM Plex Mono" pitchFamily="34" charset="-120"/>
+              </a:rPr>
+              <a:t>D</a:t>
+            </a:r>
+            <a:endParaRPr lang="en-US" sz="1300" dirty="0"/>
+          </a:p>
+        </p:txBody>
+      </p:sp>
+      <p:sp>
+        <p:nvSpPr>
+          <p:cNvPr id="24" name="Text 22"/>
+          <p:cNvSpPr txBox="1"/>
+          <p:nvPr/>
+        </p:nvSpPr>
+        <p:spPr>
+          <a:xfrm>
+            <a:off x="1417320" y="4754880"/>
+            <a:ext cx="10058400" cy="731520"/>
           </a:xfrm>
           <a:prstGeom prst="rect">
             <a:avLst/>
@@ -3730,62 +4706,23 @@
           <a:lstStyle/>
           <a:p>
             <a:pPr indent="0" marL="0">
-              <a:buNone/>
-            </a:pPr>
-            <a:r>
-              <a:rPr lang="en-US" sz="1600" b="1" dirty="0">
-                <a:solidFill>
-                  <a:srgbClr val="08A6A6"/>
+              <a:lnSpc>
+                <a:spcPct val="115000"/>
+              </a:lnSpc>
+              <a:buNone/>
+            </a:pPr>
+            <a:r>
+              <a:rPr lang="en-US" sz="1700" dirty="0">
+                <a:solidFill>
+                  <a:srgbClr val="101828"/>
                 </a:solidFill>
                 <a:latin typeface="IBM Plex Sans" pitchFamily="34" charset="0"/>
                 <a:ea typeface="IBM Plex Sans" pitchFamily="34" charset="-122"/>
                 <a:cs typeface="IBM Plex Sans" pitchFamily="34" charset="-120"/>
               </a:rPr>
-              <a:t>Watch the loop condition</a:t>
-            </a:r>
-            <a:endParaRPr lang="en-US" sz="1600" dirty="0"/>
-          </a:p>
-        </p:txBody>
-      </p:sp>
-      <p:sp>
-        <p:nvSpPr>
-          <p:cNvPr id="18" name="Text 16"/>
-          <p:cNvSpPr txBox="1"/>
-          <p:nvPr/>
-        </p:nvSpPr>
-        <p:spPr>
-          <a:xfrm>
-            <a:off x="6537960" y="4361688"/>
-            <a:ext cx="4754880" cy="1005840"/>
-          </a:xfrm>
-          <a:prstGeom prst="rect">
-            <a:avLst/>
-          </a:prstGeom>
-          <a:noFill/>
-          <a:ln/>
-        </p:spPr>
-        <p:txBody>
-          <a:bodyPr wrap="square" lIns="0" tIns="0" rIns="0" bIns="0" rtlCol="0" anchor="t"/>
-          <a:lstStyle/>
-          <a:p>
-            <a:pPr indent="0" marL="0">
-              <a:lnSpc>
-                <a:spcPct val="120000"/>
-              </a:lnSpc>
-              <a:buNone/>
-            </a:pPr>
-            <a:r>
-              <a:rPr lang="en-US" sz="1300" dirty="0">
-                <a:solidFill>
-                  <a:srgbClr val="667085"/>
-                </a:solidFill>
-                <a:latin typeface="IBM Plex Sans" pitchFamily="34" charset="0"/>
-                <a:ea typeface="IBM Plex Sans" pitchFamily="34" charset="-122"/>
-                <a:cs typeface="IBM Plex Sans" pitchFamily="34" charset="-120"/>
-              </a:rPr>
-              <a:t>Most trace table mistakes come from going round a loop one time too many or too few. Check the condition every time.</a:t>
-            </a:r>
-            <a:endParaRPr lang="en-US" sz="1300" dirty="0"/>
+              <a:t>It runs once anyway</a:t>
+            </a:r>
+            <a:endParaRPr lang="en-US" sz="1700" dirty="0"/>
           </a:p>
         </p:txBody>
       </p:sp>
@@ -3921,14 +4858,75 @@
       </p:sp>
       <p:sp>
         <p:nvSpPr>
-          <p:cNvPr id="5" name="Text 3"/>
-          <p:cNvSpPr txBox="1"/>
-          <p:nvPr/>
-        </p:nvSpPr>
-        <p:spPr>
-          <a:xfrm>
-            <a:off x="502920" y="411480"/>
-            <a:ext cx="11155680" cy="777240"/>
+          <p:cNvPr id="5" name="Shape 3"/>
+          <p:cNvSpPr/>
+          <p:nvPr/>
+        </p:nvSpPr>
+        <p:spPr>
+          <a:xfrm>
+            <a:off x="502920" y="438912"/>
+            <a:ext cx="3108960" cy="502920"/>
+          </a:xfrm>
+          <a:prstGeom prst="roundRect">
+            <a:avLst>
+              <a:gd name="adj" fmla="val 18182"/>
+            </a:avLst>
+          </a:prstGeom>
+          <a:solidFill>
+            <a:srgbClr val="F4B942"/>
+          </a:solidFill>
+          <a:ln/>
+        </p:spPr>
+      </p:sp>
+      <p:sp>
+        <p:nvSpPr>
+          <p:cNvPr id="6" name="Text 4"/>
+          <p:cNvSpPr txBox="1"/>
+          <p:nvPr/>
+        </p:nvSpPr>
+        <p:spPr>
+          <a:xfrm>
+            <a:off x="502920" y="438912"/>
+            <a:ext cx="3108960" cy="502920"/>
+          </a:xfrm>
+          <a:prstGeom prst="rect">
+            <a:avLst/>
+          </a:prstGeom>
+          <a:noFill/>
+          <a:ln/>
+        </p:spPr>
+        <p:txBody>
+          <a:bodyPr wrap="square" lIns="0" tIns="0" rIns="0" bIns="0" rtlCol="0" anchor="ctr"/>
+          <a:lstStyle/>
+          <a:p>
+            <a:pPr algn="ctr" indent="0" marL="0">
+              <a:buNone/>
+            </a:pPr>
+            <a:r>
+              <a:rPr lang="en-US" sz="1300" b="1" dirty="0">
+                <a:solidFill>
+                  <a:srgbClr val="101828"/>
+                </a:solidFill>
+                <a:latin typeface="IBM Plex Mono" pitchFamily="34" charset="0"/>
+                <a:ea typeface="IBM Plex Mono" pitchFamily="34" charset="-122"/>
+                <a:cs typeface="IBM Plex Mono" pitchFamily="34" charset="-120"/>
+              </a:rPr>
+              <a:t>★  FINAL CHALLENGE</a:t>
+            </a:r>
+            <a:endParaRPr lang="en-US" sz="1300" dirty="0"/>
+          </a:p>
+        </p:txBody>
+      </p:sp>
+      <p:sp>
+        <p:nvSpPr>
+          <p:cNvPr id="7" name="Text 5"/>
+          <p:cNvSpPr txBox="1"/>
+          <p:nvPr/>
+        </p:nvSpPr>
+        <p:spPr>
+          <a:xfrm>
+            <a:off x="502920" y="1097280"/>
+            <a:ext cx="11155680" cy="731520"/>
           </a:xfrm>
           <a:prstGeom prst="rect">
             <a:avLst/>
@@ -3944,7 +4942,7 @@
               <a:buNone/>
             </a:pPr>
             <a:r>
-              <a:rPr lang="en-US" sz="3200" b="1" dirty="0">
+              <a:rPr lang="en-US" sz="3400" b="1" dirty="0">
                 <a:solidFill>
                   <a:srgbClr val="101828"/>
                 </a:solidFill>
@@ -3952,65 +4950,26 @@
                 <a:ea typeface="IBM Plex Sans" pitchFamily="34" charset="-122"/>
                 <a:cs typeface="IBM Plex Sans" pitchFamily="34" charset="-120"/>
               </a:rPr>
-              <a:t>Exam practice</a:t>
-            </a:r>
-            <a:endParaRPr lang="en-US" sz="3200" dirty="0"/>
-          </a:p>
-        </p:txBody>
-      </p:sp>
-      <p:sp>
-        <p:nvSpPr>
-          <p:cNvPr id="6" name="Text 4"/>
-          <p:cNvSpPr txBox="1"/>
-          <p:nvPr/>
-        </p:nvSpPr>
-        <p:spPr>
-          <a:xfrm>
-            <a:off x="502920" y="1170432"/>
-            <a:ext cx="11155680" cy="411480"/>
-          </a:xfrm>
-          <a:prstGeom prst="rect">
-            <a:avLst/>
-          </a:prstGeom>
-          <a:noFill/>
-          <a:ln/>
-        </p:spPr>
-        <p:txBody>
-          <a:bodyPr wrap="square" lIns="0" tIns="0" rIns="0" bIns="0" rtlCol="0" anchor="ctr"/>
-          <a:lstStyle/>
-          <a:p>
-            <a:pPr indent="0" marL="0">
-              <a:buNone/>
-            </a:pPr>
-            <a:r>
-              <a:rPr lang="en-US" sz="1500" dirty="0">
-                <a:solidFill>
-                  <a:srgbClr val="667085"/>
-                </a:solidFill>
-                <a:latin typeface="IBM Plex Sans" pitchFamily="34" charset="0"/>
-                <a:ea typeface="IBM Plex Sans" pitchFamily="34" charset="-122"/>
-                <a:cs typeface="IBM Plex Sans" pitchFamily="34" charset="-120"/>
-              </a:rPr>
-              <a:t>Devices away. Answer from memory on the worksheet.</a:t>
-            </a:r>
-            <a:endParaRPr lang="en-US" sz="1500" dirty="0"/>
-          </a:p>
-        </p:txBody>
-      </p:sp>
-      <p:sp>
-        <p:nvSpPr>
-          <p:cNvPr id="7" name="Shape 5"/>
+              <a:t>Trace it</a:t>
+            </a:r>
+            <a:endParaRPr lang="en-US" sz="3400" dirty="0"/>
+          </a:p>
+        </p:txBody>
+      </p:sp>
+      <p:sp>
+        <p:nvSpPr>
+          <p:cNvPr id="8" name="Shape 6"/>
           <p:cNvSpPr/>
           <p:nvPr/>
         </p:nvSpPr>
         <p:spPr>
           <a:xfrm>
-            <a:off x="502920" y="1828800"/>
-            <a:ext cx="11155680" cy="1097280"/>
+            <a:off x="502920" y="2011680"/>
+            <a:ext cx="11155680" cy="2194560"/>
           </a:xfrm>
           <a:prstGeom prst="roundRect">
             <a:avLst>
-              <a:gd name="adj" fmla="val 10000"/>
+              <a:gd name="adj" fmla="val 5000"/>
             </a:avLst>
           </a:prstGeom>
           <a:solidFill>
@@ -4018,7 +4977,7 @@
           </a:solidFill>
           <a:ln w="15875">
             <a:solidFill>
-              <a:srgbClr val="D9DEE7"/>
+              <a:srgbClr val="2D63FF"/>
             </a:solidFill>
             <a:prstDash val="solid"/>
           </a:ln>
@@ -4026,14 +4985,14 @@
       </p:sp>
       <p:sp>
         <p:nvSpPr>
-          <p:cNvPr id="8" name="Text 6"/>
-          <p:cNvSpPr txBox="1"/>
-          <p:nvPr/>
-        </p:nvSpPr>
-        <p:spPr>
-          <a:xfrm>
-            <a:off x="914400" y="1938528"/>
-            <a:ext cx="9418320" cy="877824"/>
+          <p:cNvPr id="9" name="Text 7"/>
+          <p:cNvSpPr txBox="1"/>
+          <p:nvPr/>
+        </p:nvSpPr>
+        <p:spPr>
+          <a:xfrm>
+            <a:off x="1005840" y="2331720"/>
+            <a:ext cx="10149840" cy="1554480"/>
           </a:xfrm>
           <a:prstGeom prst="rect">
             <a:avLst/>
@@ -4047,12 +5006,12 @@
           <a:p>
             <a:pPr indent="0" marL="0">
               <a:lnSpc>
-                <a:spcPct val="118000"/>
+                <a:spcPct val="130000"/>
               </a:lnSpc>
               <a:buNone/>
             </a:pPr>
             <a:r>
-              <a:rPr lang="en-US" sz="1700" dirty="0">
+              <a:rPr lang="en-US" sz="2200" dirty="0">
                 <a:solidFill>
                   <a:srgbClr val="101828"/>
                 </a:solidFill>
@@ -4060,33 +5019,11 @@
                 <a:ea typeface="IBM Plex Sans" pitchFamily="34" charset="-122"/>
                 <a:cs typeface="IBM Plex Sans" pitchFamily="34" charset="-120"/>
               </a:rPr>
-              <a:t>State what is meant by a trace table.</a:t>
-            </a:r>
-            <a:endParaRPr lang="en-US" sz="1700" dirty="0"/>
-          </a:p>
-        </p:txBody>
-      </p:sp>
-      <p:sp>
-        <p:nvSpPr>
-          <p:cNvPr id="9" name="Shape 7"/>
-          <p:cNvSpPr/>
-          <p:nvPr/>
-        </p:nvSpPr>
-        <p:spPr>
-          <a:xfrm>
-            <a:off x="10515600" y="2130552"/>
-            <a:ext cx="868680" cy="493776"/>
-          </a:xfrm>
-          <a:prstGeom prst="roundRect">
-            <a:avLst>
-              <a:gd name="adj" fmla="val 18519"/>
-            </a:avLst>
-          </a:prstGeom>
-          <a:solidFill>
-            <a:srgbClr val="EEF2FB"/>
-          </a:solidFill>
-          <a:ln/>
-        </p:spPr>
+              <a:t>One last program to follow line by line. Tap the star and complete the table.</a:t>
+            </a:r>
+            <a:endParaRPr lang="en-US" sz="2200" dirty="0"/>
+          </a:p>
+        </p:txBody>
       </p:sp>
       <p:sp>
         <p:nvSpPr>
@@ -4096,74 +5033,8 @@
         </p:nvSpPr>
         <p:spPr>
           <a:xfrm>
-            <a:off x="10515600" y="2130552"/>
-            <a:ext cx="868680" cy="493776"/>
-          </a:xfrm>
-          <a:prstGeom prst="rect">
-            <a:avLst/>
-          </a:prstGeom>
-          <a:noFill/>
-          <a:ln/>
-        </p:spPr>
-        <p:txBody>
-          <a:bodyPr wrap="square" lIns="0" tIns="0" rIns="0" bIns="0" rtlCol="0" anchor="ctr"/>
-          <a:lstStyle/>
-          <a:p>
-            <a:pPr algn="ctr" indent="0" marL="0">
-              <a:buNone/>
-            </a:pPr>
-            <a:r>
-              <a:rPr lang="en-US" sz="1500" b="1" dirty="0">
-                <a:solidFill>
-                  <a:srgbClr val="2D63FF"/>
-                </a:solidFill>
-                <a:latin typeface="IBM Plex Mono" pitchFamily="34" charset="0"/>
-                <a:ea typeface="IBM Plex Mono" pitchFamily="34" charset="-122"/>
-                <a:cs typeface="IBM Plex Mono" pitchFamily="34" charset="-120"/>
-              </a:rPr>
-              <a:t>[2]</a:t>
-            </a:r>
-            <a:endParaRPr lang="en-US" sz="1500" dirty="0"/>
-          </a:p>
-        </p:txBody>
-      </p:sp>
-      <p:sp>
-        <p:nvSpPr>
-          <p:cNvPr id="11" name="Shape 9"/>
-          <p:cNvSpPr/>
-          <p:nvPr/>
-        </p:nvSpPr>
-        <p:spPr>
-          <a:xfrm>
-            <a:off x="502920" y="3127248"/>
-            <a:ext cx="11155680" cy="1097280"/>
-          </a:xfrm>
-          <a:prstGeom prst="roundRect">
-            <a:avLst>
-              <a:gd name="adj" fmla="val 10000"/>
-            </a:avLst>
-          </a:prstGeom>
-          <a:solidFill>
-            <a:srgbClr val="FFFFFF"/>
-          </a:solidFill>
-          <a:ln w="15875">
-            <a:solidFill>
-              <a:srgbClr val="D9DEE7"/>
-            </a:solidFill>
-            <a:prstDash val="solid"/>
-          </a:ln>
-        </p:spPr>
-      </p:sp>
-      <p:sp>
-        <p:nvSpPr>
-          <p:cNvPr id="12" name="Text 10"/>
-          <p:cNvSpPr txBox="1"/>
-          <p:nvPr/>
-        </p:nvSpPr>
-        <p:spPr>
-          <a:xfrm>
-            <a:off x="914400" y="3236976"/>
-            <a:ext cx="9418320" cy="877824"/>
+            <a:off x="502920" y="4526280"/>
+            <a:ext cx="11155680" cy="457200"/>
           </a:xfrm>
           <a:prstGeom prst="rect">
             <a:avLst/>
@@ -4176,214 +5047,20 @@
           <a:lstStyle/>
           <a:p>
             <a:pPr indent="0" marL="0">
-              <a:lnSpc>
-                <a:spcPct val="118000"/>
-              </a:lnSpc>
-              <a:buNone/>
-            </a:pPr>
-            <a:r>
-              <a:rPr lang="en-US" sz="1700" dirty="0">
-                <a:solidFill>
-                  <a:srgbClr val="101828"/>
+              <a:buNone/>
+            </a:pPr>
+            <a:r>
+              <a:rPr lang="en-US" sz="1600" dirty="0">
+                <a:solidFill>
+                  <a:srgbClr val="667085"/>
                 </a:solidFill>
                 <a:latin typeface="IBM Plex Sans" pitchFamily="34" charset="0"/>
                 <a:ea typeface="IBM Plex Sans" pitchFamily="34" charset="-122"/>
                 <a:cs typeface="IBM Plex Sans" pitchFamily="34" charset="-120"/>
               </a:rPr>
-              <a:t>Explain how a trace table helps a programmer find a logic error.</a:t>
-            </a:r>
-            <a:endParaRPr lang="en-US" sz="1700" dirty="0"/>
-          </a:p>
-        </p:txBody>
-      </p:sp>
-      <p:sp>
-        <p:nvSpPr>
-          <p:cNvPr id="13" name="Shape 11"/>
-          <p:cNvSpPr/>
-          <p:nvPr/>
-        </p:nvSpPr>
-        <p:spPr>
-          <a:xfrm>
-            <a:off x="10515600" y="3429000"/>
-            <a:ext cx="868680" cy="493776"/>
-          </a:xfrm>
-          <a:prstGeom prst="roundRect">
-            <a:avLst>
-              <a:gd name="adj" fmla="val 18519"/>
-            </a:avLst>
-          </a:prstGeom>
-          <a:solidFill>
-            <a:srgbClr val="EEF2FB"/>
-          </a:solidFill>
-          <a:ln/>
-        </p:spPr>
-      </p:sp>
-      <p:sp>
-        <p:nvSpPr>
-          <p:cNvPr id="14" name="Text 12"/>
-          <p:cNvSpPr txBox="1"/>
-          <p:nvPr/>
-        </p:nvSpPr>
-        <p:spPr>
-          <a:xfrm>
-            <a:off x="10515600" y="3429000"/>
-            <a:ext cx="868680" cy="493776"/>
-          </a:xfrm>
-          <a:prstGeom prst="rect">
-            <a:avLst/>
-          </a:prstGeom>
-          <a:noFill/>
-          <a:ln/>
-        </p:spPr>
-        <p:txBody>
-          <a:bodyPr wrap="square" lIns="0" tIns="0" rIns="0" bIns="0" rtlCol="0" anchor="ctr"/>
-          <a:lstStyle/>
-          <a:p>
-            <a:pPr algn="ctr" indent="0" marL="0">
-              <a:buNone/>
-            </a:pPr>
-            <a:r>
-              <a:rPr lang="en-US" sz="1500" b="1" dirty="0">
-                <a:solidFill>
-                  <a:srgbClr val="2D63FF"/>
-                </a:solidFill>
-                <a:latin typeface="IBM Plex Mono" pitchFamily="34" charset="0"/>
-                <a:ea typeface="IBM Plex Mono" pitchFamily="34" charset="-122"/>
-                <a:cs typeface="IBM Plex Mono" pitchFamily="34" charset="-120"/>
-              </a:rPr>
-              <a:t>[3]</a:t>
-            </a:r>
-            <a:endParaRPr lang="en-US" sz="1500" dirty="0"/>
-          </a:p>
-        </p:txBody>
-      </p:sp>
-      <p:sp>
-        <p:nvSpPr>
-          <p:cNvPr id="15" name="Shape 13"/>
-          <p:cNvSpPr/>
-          <p:nvPr/>
-        </p:nvSpPr>
-        <p:spPr>
-          <a:xfrm>
-            <a:off x="502920" y="4425696"/>
-            <a:ext cx="11155680" cy="1097280"/>
-          </a:xfrm>
-          <a:prstGeom prst="roundRect">
-            <a:avLst>
-              <a:gd name="adj" fmla="val 10000"/>
-            </a:avLst>
-          </a:prstGeom>
-          <a:solidFill>
-            <a:srgbClr val="FFFFFF"/>
-          </a:solidFill>
-          <a:ln w="15875">
-            <a:solidFill>
-              <a:srgbClr val="D9DEE7"/>
-            </a:solidFill>
-            <a:prstDash val="solid"/>
-          </a:ln>
-        </p:spPr>
-      </p:sp>
-      <p:sp>
-        <p:nvSpPr>
-          <p:cNvPr id="16" name="Text 14"/>
-          <p:cNvSpPr txBox="1"/>
-          <p:nvPr/>
-        </p:nvSpPr>
-        <p:spPr>
-          <a:xfrm>
-            <a:off x="914400" y="4535424"/>
-            <a:ext cx="9418320" cy="877824"/>
-          </a:xfrm>
-          <a:prstGeom prst="rect">
-            <a:avLst/>
-          </a:prstGeom>
-          <a:noFill/>
-          <a:ln/>
-        </p:spPr>
-        <p:txBody>
-          <a:bodyPr wrap="square" lIns="0" tIns="0" rIns="0" bIns="0" rtlCol="0" anchor="ctr"/>
-          <a:lstStyle/>
-          <a:p>
-            <a:pPr indent="0" marL="0">
-              <a:lnSpc>
-                <a:spcPct val="118000"/>
-              </a:lnSpc>
-              <a:buNone/>
-            </a:pPr>
-            <a:r>
-              <a:rPr lang="en-US" sz="1700" dirty="0">
-                <a:solidFill>
-                  <a:srgbClr val="101828"/>
-                </a:solidFill>
-                <a:latin typeface="IBM Plex Sans" pitchFamily="34" charset="0"/>
-                <a:ea typeface="IBM Plex Sans" pitchFamily="34" charset="-122"/>
-                <a:cs typeface="IBM Plex Sans" pitchFamily="34" charset="-120"/>
-              </a:rPr>
-              <a:t>Complete the trace table for the program shown, which is run with an input of 9.</a:t>
-            </a:r>
-            <a:endParaRPr lang="en-US" sz="1700" dirty="0"/>
-          </a:p>
-        </p:txBody>
-      </p:sp>
-      <p:sp>
-        <p:nvSpPr>
-          <p:cNvPr id="17" name="Shape 15"/>
-          <p:cNvSpPr/>
-          <p:nvPr/>
-        </p:nvSpPr>
-        <p:spPr>
-          <a:xfrm>
-            <a:off x="10515600" y="4727448"/>
-            <a:ext cx="868680" cy="493776"/>
-          </a:xfrm>
-          <a:prstGeom prst="roundRect">
-            <a:avLst>
-              <a:gd name="adj" fmla="val 18519"/>
-            </a:avLst>
-          </a:prstGeom>
-          <a:solidFill>
-            <a:srgbClr val="EEF2FB"/>
-          </a:solidFill>
-          <a:ln/>
-        </p:spPr>
-      </p:sp>
-      <p:sp>
-        <p:nvSpPr>
-          <p:cNvPr id="18" name="Text 16"/>
-          <p:cNvSpPr txBox="1"/>
-          <p:nvPr/>
-        </p:nvSpPr>
-        <p:spPr>
-          <a:xfrm>
-            <a:off x="10515600" y="4727448"/>
-            <a:ext cx="868680" cy="493776"/>
-          </a:xfrm>
-          <a:prstGeom prst="rect">
-            <a:avLst/>
-          </a:prstGeom>
-          <a:noFill/>
-          <a:ln/>
-        </p:spPr>
-        <p:txBody>
-          <a:bodyPr wrap="square" lIns="0" tIns="0" rIns="0" bIns="0" rtlCol="0" anchor="ctr"/>
-          <a:lstStyle/>
-          <a:p>
-            <a:pPr algn="ctr" indent="0" marL="0">
-              <a:buNone/>
-            </a:pPr>
-            <a:r>
-              <a:rPr lang="en-US" sz="1500" b="1" dirty="0">
-                <a:solidFill>
-                  <a:srgbClr val="2D63FF"/>
-                </a:solidFill>
-                <a:latin typeface="IBM Plex Mono" pitchFamily="34" charset="0"/>
-                <a:ea typeface="IBM Plex Mono" pitchFamily="34" charset="-122"/>
-                <a:cs typeface="IBM Plex Mono" pitchFamily="34" charset="-120"/>
-              </a:rPr>
-              <a:t>[6]</a:t>
-            </a:r>
-            <a:endParaRPr lang="en-US" sz="1500" dirty="0"/>
+              <a:t>Predict on paper first, then look down and test it.</a:t>
+            </a:r>
+            <a:endParaRPr lang="en-US" sz="1600" dirty="0"/>
           </a:p>
         </p:txBody>
       </p:sp>
@@ -4398,6 +5075,1244 @@
 <file path=ppt/slides/slide14.xml><?xml version="1.0" encoding="utf-8"?>
 <p:sld xmlns:a="http://schemas.openxmlformats.org/drawingml/2006/main" xmlns:r="http://schemas.openxmlformats.org/officeDocument/2006/relationships" xmlns:p="http://schemas.openxmlformats.org/presentationml/2006/main">
   <p:cSld name="Slide 14">
+    <p:bg>
+      <p:bgPr>
+        <a:solidFill>
+          <a:srgbClr val="F7F7F4"/>
+        </a:solidFill>
+      </p:bgPr>
+    </p:bg>
+    <p:spTree>
+      <p:nvGrpSpPr>
+        <p:cNvPr id="1" name=""/>
+        <p:cNvGrpSpPr/>
+        <p:nvPr/>
+      </p:nvGrpSpPr>
+      <p:grpSpPr>
+        <a:xfrm>
+          <a:off x="0" y="0"/>
+          <a:ext cx="0" cy="0"/>
+          <a:chOff x="0" y="0"/>
+          <a:chExt cx="0" cy="0"/>
+        </a:xfrm>
+      </p:grpSpPr>
+      <p:sp>
+        <p:nvSpPr>
+          <p:cNvPr id="2" name="Shape 0"/>
+          <p:cNvSpPr/>
+          <p:nvPr/>
+        </p:nvSpPr>
+        <p:spPr>
+          <a:xfrm>
+            <a:off x="0" y="0"/>
+            <a:ext cx="12188952" cy="82296"/>
+          </a:xfrm>
+          <a:prstGeom prst="rect">
+            <a:avLst/>
+          </a:prstGeom>
+          <a:solidFill>
+            <a:srgbClr val="2D63FF"/>
+          </a:solidFill>
+          <a:ln/>
+        </p:spPr>
+      </p:sp>
+      <p:sp>
+        <p:nvSpPr>
+          <p:cNvPr id="3" name="Text 1"/>
+          <p:cNvSpPr txBox="1"/>
+          <p:nvPr/>
+        </p:nvSpPr>
+        <p:spPr>
+          <a:xfrm>
+            <a:off x="502920" y="6236208"/>
+            <a:ext cx="7772400" cy="365760"/>
+          </a:xfrm>
+          <a:prstGeom prst="rect">
+            <a:avLst/>
+          </a:prstGeom>
+          <a:noFill/>
+          <a:ln/>
+        </p:spPr>
+        <p:txBody>
+          <a:bodyPr wrap="square" lIns="0" tIns="0" rIns="0" bIns="0" rtlCol="0" anchor="ctr"/>
+          <a:lstStyle/>
+          <a:p>
+            <a:pPr indent="0" marL="0">
+              <a:buNone/>
+            </a:pPr>
+            <a:r>
+              <a:rPr lang="en-US" sz="1100" dirty="0">
+                <a:solidFill>
+                  <a:srgbClr val="667085"/>
+                </a:solidFill>
+                <a:latin typeface="IBM Plex Mono" pitchFamily="34" charset="0"/>
+                <a:ea typeface="IBM Plex Mono" pitchFamily="34" charset="-122"/>
+                <a:cs typeface="IBM Plex Mono" pitchFamily="34" charset="-120"/>
+              </a:rPr>
+              <a:t>2.1 Algorithms  |  Lesson 11</a:t>
+            </a:r>
+            <a:endParaRPr lang="en-US" sz="1100" dirty="0"/>
+          </a:p>
+        </p:txBody>
+      </p:sp>
+      <p:sp>
+        <p:nvSpPr>
+          <p:cNvPr id="4" name="Text 2"/>
+          <p:cNvSpPr txBox="1"/>
+          <p:nvPr/>
+        </p:nvSpPr>
+        <p:spPr>
+          <a:xfrm>
+            <a:off x="9326880" y="6236208"/>
+            <a:ext cx="2377440" cy="365760"/>
+          </a:xfrm>
+          <a:prstGeom prst="rect">
+            <a:avLst/>
+          </a:prstGeom>
+          <a:noFill/>
+          <a:ln/>
+        </p:spPr>
+        <p:txBody>
+          <a:bodyPr wrap="square" lIns="0" tIns="0" rIns="0" bIns="0" rtlCol="0" anchor="ctr"/>
+          <a:lstStyle/>
+          <a:p>
+            <a:pPr algn="r" indent="0" marL="0">
+              <a:buNone/>
+            </a:pPr>
+            <a:r>
+              <a:rPr lang="en-US" sz="1100" dirty="0">
+                <a:solidFill>
+                  <a:srgbClr val="667085"/>
+                </a:solidFill>
+                <a:latin typeface="IBM Plex Mono" pitchFamily="34" charset="0"/>
+                <a:ea typeface="IBM Plex Mono" pitchFamily="34" charset="-122"/>
+                <a:cs typeface="IBM Plex Mono" pitchFamily="34" charset="-120"/>
+              </a:rPr>
+              <a:t>Revise 360</a:t>
+            </a:r>
+            <a:endParaRPr lang="en-US" sz="1100" dirty="0"/>
+          </a:p>
+        </p:txBody>
+      </p:sp>
+      <p:sp>
+        <p:nvSpPr>
+          <p:cNvPr id="5" name="Text 3"/>
+          <p:cNvSpPr txBox="1"/>
+          <p:nvPr/>
+        </p:nvSpPr>
+        <p:spPr>
+          <a:xfrm>
+            <a:off x="502920" y="411480"/>
+            <a:ext cx="11155680" cy="777240"/>
+          </a:xfrm>
+          <a:prstGeom prst="rect">
+            <a:avLst/>
+          </a:prstGeom>
+          <a:noFill/>
+          <a:ln/>
+        </p:spPr>
+        <p:txBody>
+          <a:bodyPr wrap="square" lIns="0" tIns="0" rIns="0" bIns="0" rtlCol="0" anchor="ctr"/>
+          <a:lstStyle/>
+          <a:p>
+            <a:pPr indent="0" marL="0">
+              <a:buNone/>
+            </a:pPr>
+            <a:r>
+              <a:rPr lang="en-US" sz="3200" b="1" dirty="0">
+                <a:solidFill>
+                  <a:srgbClr val="101828"/>
+                </a:solidFill>
+                <a:latin typeface="IBM Plex Sans" pitchFamily="34" charset="0"/>
+                <a:ea typeface="IBM Plex Sans" pitchFamily="34" charset="-122"/>
+                <a:cs typeface="IBM Plex Sans" pitchFamily="34" charset="-120"/>
+              </a:rPr>
+              <a:t>Worth knowing</a:t>
+            </a:r>
+            <a:endParaRPr lang="en-US" sz="3200" dirty="0"/>
+          </a:p>
+        </p:txBody>
+      </p:sp>
+      <p:sp>
+        <p:nvSpPr>
+          <p:cNvPr id="6" name="Text 4"/>
+          <p:cNvSpPr txBox="1"/>
+          <p:nvPr/>
+        </p:nvSpPr>
+        <p:spPr>
+          <a:xfrm>
+            <a:off x="502920" y="1170432"/>
+            <a:ext cx="11155680" cy="411480"/>
+          </a:xfrm>
+          <a:prstGeom prst="rect">
+            <a:avLst/>
+          </a:prstGeom>
+          <a:noFill/>
+          <a:ln/>
+        </p:spPr>
+        <p:txBody>
+          <a:bodyPr wrap="square" lIns="0" tIns="0" rIns="0" bIns="0" rtlCol="0" anchor="ctr"/>
+          <a:lstStyle/>
+          <a:p>
+            <a:pPr indent="0" marL="0">
+              <a:buNone/>
+            </a:pPr>
+            <a:r>
+              <a:rPr lang="en-US" sz="1500" dirty="0">
+                <a:solidFill>
+                  <a:srgbClr val="667085"/>
+                </a:solidFill>
+                <a:latin typeface="IBM Plex Sans" pitchFamily="34" charset="0"/>
+                <a:ea typeface="IBM Plex Sans" pitchFamily="34" charset="-122"/>
+                <a:cs typeface="IBM Plex Sans" pitchFamily="34" charset="-120"/>
+              </a:rPr>
+              <a:t>The information markers dotted around the room</a:t>
+            </a:r>
+            <a:endParaRPr lang="en-US" sz="1500" dirty="0"/>
+          </a:p>
+        </p:txBody>
+      </p:sp>
+      <p:sp>
+        <p:nvSpPr>
+          <p:cNvPr id="7" name="Shape 5"/>
+          <p:cNvSpPr/>
+          <p:nvPr/>
+        </p:nvSpPr>
+        <p:spPr>
+          <a:xfrm>
+            <a:off x="502920" y="1828800"/>
+            <a:ext cx="5394960" cy="1737360"/>
+          </a:xfrm>
+          <a:prstGeom prst="roundRect">
+            <a:avLst>
+              <a:gd name="adj" fmla="val 6316"/>
+            </a:avLst>
+          </a:prstGeom>
+          <a:solidFill>
+            <a:srgbClr val="FFFFFF"/>
+          </a:solidFill>
+          <a:ln w="15875">
+            <a:solidFill>
+              <a:srgbClr val="2D63FF"/>
+            </a:solidFill>
+            <a:prstDash val="solid"/>
+          </a:ln>
+        </p:spPr>
+      </p:sp>
+      <p:sp>
+        <p:nvSpPr>
+          <p:cNvPr id="8" name="Text 6"/>
+          <p:cNvSpPr txBox="1"/>
+          <p:nvPr/>
+        </p:nvSpPr>
+        <p:spPr>
+          <a:xfrm>
+            <a:off x="822960" y="2011680"/>
+            <a:ext cx="4754880" cy="365760"/>
+          </a:xfrm>
+          <a:prstGeom prst="rect">
+            <a:avLst/>
+          </a:prstGeom>
+          <a:noFill/>
+          <a:ln/>
+        </p:spPr>
+        <p:txBody>
+          <a:bodyPr wrap="square" lIns="0" tIns="0" rIns="0" bIns="0" rtlCol="0" anchor="ctr"/>
+          <a:lstStyle/>
+          <a:p>
+            <a:pPr indent="0" marL="0">
+              <a:buNone/>
+            </a:pPr>
+            <a:r>
+              <a:rPr lang="en-US" sz="1600" b="1" dirty="0">
+                <a:solidFill>
+                  <a:srgbClr val="2D63FF"/>
+                </a:solidFill>
+                <a:latin typeface="IBM Plex Sans" pitchFamily="34" charset="0"/>
+                <a:ea typeface="IBM Plex Sans" pitchFamily="34" charset="-122"/>
+                <a:cs typeface="IBM Plex Sans" pitchFamily="34" charset="-120"/>
+              </a:rPr>
+              <a:t>Also called a dry run</a:t>
+            </a:r>
+            <a:endParaRPr lang="en-US" sz="1600" dirty="0"/>
+          </a:p>
+        </p:txBody>
+      </p:sp>
+      <p:sp>
+        <p:nvSpPr>
+          <p:cNvPr id="9" name="Text 7"/>
+          <p:cNvSpPr txBox="1"/>
+          <p:nvPr/>
+        </p:nvSpPr>
+        <p:spPr>
+          <a:xfrm>
+            <a:off x="822960" y="2395728"/>
+            <a:ext cx="4754880" cy="1005840"/>
+          </a:xfrm>
+          <a:prstGeom prst="rect">
+            <a:avLst/>
+          </a:prstGeom>
+          <a:noFill/>
+          <a:ln/>
+        </p:spPr>
+        <p:txBody>
+          <a:bodyPr wrap="square" lIns="0" tIns="0" rIns="0" bIns="0" rtlCol="0" anchor="t"/>
+          <a:lstStyle/>
+          <a:p>
+            <a:pPr indent="0" marL="0">
+              <a:lnSpc>
+                <a:spcPct val="120000"/>
+              </a:lnSpc>
+              <a:buNone/>
+            </a:pPr>
+            <a:r>
+              <a:rPr lang="en-US" sz="1300" dirty="0">
+                <a:solidFill>
+                  <a:srgbClr val="667085"/>
+                </a:solidFill>
+                <a:latin typeface="IBM Plex Sans" pitchFamily="34" charset="0"/>
+                <a:ea typeface="IBM Plex Sans" pitchFamily="34" charset="-122"/>
+                <a:cs typeface="IBM Plex Sans" pitchFamily="34" charset="-120"/>
+              </a:rPr>
+              <a:t>Running a program in your head with pen and paper is a dry run; the trace table is where you write it down.</a:t>
+            </a:r>
+            <a:endParaRPr lang="en-US" sz="1300" dirty="0"/>
+          </a:p>
+        </p:txBody>
+      </p:sp>
+      <p:sp>
+        <p:nvSpPr>
+          <p:cNvPr id="10" name="Shape 8"/>
+          <p:cNvSpPr/>
+          <p:nvPr/>
+        </p:nvSpPr>
+        <p:spPr>
+          <a:xfrm>
+            <a:off x="6217920" y="1828800"/>
+            <a:ext cx="5394960" cy="1737360"/>
+          </a:xfrm>
+          <a:prstGeom prst="roundRect">
+            <a:avLst>
+              <a:gd name="adj" fmla="val 6316"/>
+            </a:avLst>
+          </a:prstGeom>
+          <a:solidFill>
+            <a:srgbClr val="FFFFFF"/>
+          </a:solidFill>
+          <a:ln w="15875">
+            <a:solidFill>
+              <a:srgbClr val="08A6A6"/>
+            </a:solidFill>
+            <a:prstDash val="solid"/>
+          </a:ln>
+        </p:spPr>
+      </p:sp>
+      <p:sp>
+        <p:nvSpPr>
+          <p:cNvPr id="11" name="Text 9"/>
+          <p:cNvSpPr txBox="1"/>
+          <p:nvPr/>
+        </p:nvSpPr>
+        <p:spPr>
+          <a:xfrm>
+            <a:off x="6537960" y="2011680"/>
+            <a:ext cx="4754880" cy="365760"/>
+          </a:xfrm>
+          <a:prstGeom prst="rect">
+            <a:avLst/>
+          </a:prstGeom>
+          <a:noFill/>
+          <a:ln/>
+        </p:spPr>
+        <p:txBody>
+          <a:bodyPr wrap="square" lIns="0" tIns="0" rIns="0" bIns="0" rtlCol="0" anchor="ctr"/>
+          <a:lstStyle/>
+          <a:p>
+            <a:pPr indent="0" marL="0">
+              <a:buNone/>
+            </a:pPr>
+            <a:r>
+              <a:rPr lang="en-US" sz="1600" b="1" dirty="0">
+                <a:solidFill>
+                  <a:srgbClr val="08A6A6"/>
+                </a:solidFill>
+                <a:latin typeface="IBM Plex Sans" pitchFamily="34" charset="0"/>
+                <a:ea typeface="IBM Plex Sans" pitchFamily="34" charset="-122"/>
+                <a:cs typeface="IBM Plex Sans" pitchFamily="34" charset="-120"/>
+              </a:rPr>
+              <a:t>Before debuggers</a:t>
+            </a:r>
+            <a:endParaRPr lang="en-US" sz="1600" dirty="0"/>
+          </a:p>
+        </p:txBody>
+      </p:sp>
+      <p:sp>
+        <p:nvSpPr>
+          <p:cNvPr id="12" name="Text 10"/>
+          <p:cNvSpPr txBox="1"/>
+          <p:nvPr/>
+        </p:nvSpPr>
+        <p:spPr>
+          <a:xfrm>
+            <a:off x="6537960" y="2395728"/>
+            <a:ext cx="4754880" cy="1005840"/>
+          </a:xfrm>
+          <a:prstGeom prst="rect">
+            <a:avLst/>
+          </a:prstGeom>
+          <a:noFill/>
+          <a:ln/>
+        </p:spPr>
+        <p:txBody>
+          <a:bodyPr wrap="square" lIns="0" tIns="0" rIns="0" bIns="0" rtlCol="0" anchor="t"/>
+          <a:lstStyle/>
+          <a:p>
+            <a:pPr indent="0" marL="0">
+              <a:lnSpc>
+                <a:spcPct val="120000"/>
+              </a:lnSpc>
+              <a:buNone/>
+            </a:pPr>
+            <a:r>
+              <a:rPr lang="en-US" sz="1300" dirty="0">
+                <a:solidFill>
+                  <a:srgbClr val="667085"/>
+                </a:solidFill>
+                <a:latin typeface="IBM Plex Sans" pitchFamily="34" charset="0"/>
+                <a:ea typeface="IBM Plex Sans" pitchFamily="34" charset="-122"/>
+                <a:cs typeface="IBM Plex Sans" pitchFamily="34" charset="-120"/>
+              </a:rPr>
+              <a:t>Early programmers had no way to inspect a running program, so tracing by hand was the only debugging technique there was.</a:t>
+            </a:r>
+            <a:endParaRPr lang="en-US" sz="1300" dirty="0"/>
+          </a:p>
+        </p:txBody>
+      </p:sp>
+      <p:sp>
+        <p:nvSpPr>
+          <p:cNvPr id="13" name="Shape 11"/>
+          <p:cNvSpPr/>
+          <p:nvPr/>
+        </p:nvSpPr>
+        <p:spPr>
+          <a:xfrm>
+            <a:off x="502920" y="3794760"/>
+            <a:ext cx="5394960" cy="1737360"/>
+          </a:xfrm>
+          <a:prstGeom prst="roundRect">
+            <a:avLst>
+              <a:gd name="adj" fmla="val 6316"/>
+            </a:avLst>
+          </a:prstGeom>
+          <a:solidFill>
+            <a:srgbClr val="FFFFFF"/>
+          </a:solidFill>
+          <a:ln w="15875">
+            <a:solidFill>
+              <a:srgbClr val="2D63FF"/>
+            </a:solidFill>
+            <a:prstDash val="solid"/>
+          </a:ln>
+        </p:spPr>
+      </p:sp>
+      <p:sp>
+        <p:nvSpPr>
+          <p:cNvPr id="14" name="Text 12"/>
+          <p:cNvSpPr txBox="1"/>
+          <p:nvPr/>
+        </p:nvSpPr>
+        <p:spPr>
+          <a:xfrm>
+            <a:off x="822960" y="3977640"/>
+            <a:ext cx="4754880" cy="365760"/>
+          </a:xfrm>
+          <a:prstGeom prst="rect">
+            <a:avLst/>
+          </a:prstGeom>
+          <a:noFill/>
+          <a:ln/>
+        </p:spPr>
+        <p:txBody>
+          <a:bodyPr wrap="square" lIns="0" tIns="0" rIns="0" bIns="0" rtlCol="0" anchor="ctr"/>
+          <a:lstStyle/>
+          <a:p>
+            <a:pPr indent="0" marL="0">
+              <a:buNone/>
+            </a:pPr>
+            <a:r>
+              <a:rPr lang="en-US" sz="1600" b="1" dirty="0">
+                <a:solidFill>
+                  <a:srgbClr val="2D63FF"/>
+                </a:solidFill>
+                <a:latin typeface="IBM Plex Sans" pitchFamily="34" charset="0"/>
+                <a:ea typeface="IBM Plex Sans" pitchFamily="34" charset="-122"/>
+                <a:cs typeface="IBM Plex Sans" pitchFamily="34" charset="-120"/>
+              </a:rPr>
+              <a:t>Still used</a:t>
+            </a:r>
+            <a:endParaRPr lang="en-US" sz="1600" dirty="0"/>
+          </a:p>
+        </p:txBody>
+      </p:sp>
+      <p:sp>
+        <p:nvSpPr>
+          <p:cNvPr id="15" name="Text 13"/>
+          <p:cNvSpPr txBox="1"/>
+          <p:nvPr/>
+        </p:nvSpPr>
+        <p:spPr>
+          <a:xfrm>
+            <a:off x="822960" y="4361688"/>
+            <a:ext cx="4754880" cy="1005840"/>
+          </a:xfrm>
+          <a:prstGeom prst="rect">
+            <a:avLst/>
+          </a:prstGeom>
+          <a:noFill/>
+          <a:ln/>
+        </p:spPr>
+        <p:txBody>
+          <a:bodyPr wrap="square" lIns="0" tIns="0" rIns="0" bIns="0" rtlCol="0" anchor="t"/>
+          <a:lstStyle/>
+          <a:p>
+            <a:pPr indent="0" marL="0">
+              <a:lnSpc>
+                <a:spcPct val="120000"/>
+              </a:lnSpc>
+              <a:buNone/>
+            </a:pPr>
+            <a:r>
+              <a:rPr lang="en-US" sz="1300" dirty="0">
+                <a:solidFill>
+                  <a:srgbClr val="667085"/>
+                </a:solidFill>
+                <a:latin typeface="IBM Plex Sans" pitchFamily="34" charset="0"/>
+                <a:ea typeface="IBM Plex Sans" pitchFamily="34" charset="-122"/>
+                <a:cs typeface="IBM Plex Sans" pitchFamily="34" charset="-120"/>
+              </a:rPr>
+              <a:t>Professional programmers still trace tricky loops by hand, because a debugger shows what happens and a trace shows why.</a:t>
+            </a:r>
+            <a:endParaRPr lang="en-US" sz="1300" dirty="0"/>
+          </a:p>
+        </p:txBody>
+      </p:sp>
+      <p:sp>
+        <p:nvSpPr>
+          <p:cNvPr id="16" name="Shape 14"/>
+          <p:cNvSpPr/>
+          <p:nvPr/>
+        </p:nvSpPr>
+        <p:spPr>
+          <a:xfrm>
+            <a:off x="6217920" y="3794760"/>
+            <a:ext cx="5394960" cy="1737360"/>
+          </a:xfrm>
+          <a:prstGeom prst="roundRect">
+            <a:avLst>
+              <a:gd name="adj" fmla="val 6316"/>
+            </a:avLst>
+          </a:prstGeom>
+          <a:solidFill>
+            <a:srgbClr val="FFFFFF"/>
+          </a:solidFill>
+          <a:ln w="15875">
+            <a:solidFill>
+              <a:srgbClr val="08A6A6"/>
+            </a:solidFill>
+            <a:prstDash val="solid"/>
+          </a:ln>
+        </p:spPr>
+      </p:sp>
+      <p:sp>
+        <p:nvSpPr>
+          <p:cNvPr id="17" name="Text 15"/>
+          <p:cNvSpPr txBox="1"/>
+          <p:nvPr/>
+        </p:nvSpPr>
+        <p:spPr>
+          <a:xfrm>
+            <a:off x="6537960" y="3977640"/>
+            <a:ext cx="4754880" cy="365760"/>
+          </a:xfrm>
+          <a:prstGeom prst="rect">
+            <a:avLst/>
+          </a:prstGeom>
+          <a:noFill/>
+          <a:ln/>
+        </p:spPr>
+        <p:txBody>
+          <a:bodyPr wrap="square" lIns="0" tIns="0" rIns="0" bIns="0" rtlCol="0" anchor="ctr"/>
+          <a:lstStyle/>
+          <a:p>
+            <a:pPr indent="0" marL="0">
+              <a:buNone/>
+            </a:pPr>
+            <a:r>
+              <a:rPr lang="en-US" sz="1600" b="1" dirty="0">
+                <a:solidFill>
+                  <a:srgbClr val="08A6A6"/>
+                </a:solidFill>
+                <a:latin typeface="IBM Plex Sans" pitchFamily="34" charset="0"/>
+                <a:ea typeface="IBM Plex Sans" pitchFamily="34" charset="-122"/>
+                <a:cs typeface="IBM Plex Sans" pitchFamily="34" charset="-120"/>
+              </a:rPr>
+              <a:t>Watch the loop condition</a:t>
+            </a:r>
+            <a:endParaRPr lang="en-US" sz="1600" dirty="0"/>
+          </a:p>
+        </p:txBody>
+      </p:sp>
+      <p:sp>
+        <p:nvSpPr>
+          <p:cNvPr id="18" name="Text 16"/>
+          <p:cNvSpPr txBox="1"/>
+          <p:nvPr/>
+        </p:nvSpPr>
+        <p:spPr>
+          <a:xfrm>
+            <a:off x="6537960" y="4361688"/>
+            <a:ext cx="4754880" cy="1005840"/>
+          </a:xfrm>
+          <a:prstGeom prst="rect">
+            <a:avLst/>
+          </a:prstGeom>
+          <a:noFill/>
+          <a:ln/>
+        </p:spPr>
+        <p:txBody>
+          <a:bodyPr wrap="square" lIns="0" tIns="0" rIns="0" bIns="0" rtlCol="0" anchor="t"/>
+          <a:lstStyle/>
+          <a:p>
+            <a:pPr indent="0" marL="0">
+              <a:lnSpc>
+                <a:spcPct val="120000"/>
+              </a:lnSpc>
+              <a:buNone/>
+            </a:pPr>
+            <a:r>
+              <a:rPr lang="en-US" sz="1300" dirty="0">
+                <a:solidFill>
+                  <a:srgbClr val="667085"/>
+                </a:solidFill>
+                <a:latin typeface="IBM Plex Sans" pitchFamily="34" charset="0"/>
+                <a:ea typeface="IBM Plex Sans" pitchFamily="34" charset="-122"/>
+                <a:cs typeface="IBM Plex Sans" pitchFamily="34" charset="-120"/>
+              </a:rPr>
+              <a:t>Most trace table mistakes come from going round a loop one time too many or too few. Check the condition every time.</a:t>
+            </a:r>
+            <a:endParaRPr lang="en-US" sz="1300" dirty="0"/>
+          </a:p>
+        </p:txBody>
+      </p:sp>
+    </p:spTree>
+  </p:cSld>
+  <p:clrMapOvr>
+    <a:masterClrMapping/>
+  </p:clrMapOvr>
+</p:sld>
+</file>
+
+<file path=ppt/slides/slide15.xml><?xml version="1.0" encoding="utf-8"?>
+<p:sld xmlns:a="http://schemas.openxmlformats.org/drawingml/2006/main" xmlns:r="http://schemas.openxmlformats.org/officeDocument/2006/relationships" xmlns:p="http://schemas.openxmlformats.org/presentationml/2006/main">
+  <p:cSld name="Slide 15">
+    <p:bg>
+      <p:bgPr>
+        <a:solidFill>
+          <a:srgbClr val="F7F7F4"/>
+        </a:solidFill>
+      </p:bgPr>
+    </p:bg>
+    <p:spTree>
+      <p:nvGrpSpPr>
+        <p:cNvPr id="1" name=""/>
+        <p:cNvGrpSpPr/>
+        <p:nvPr/>
+      </p:nvGrpSpPr>
+      <p:grpSpPr>
+        <a:xfrm>
+          <a:off x="0" y="0"/>
+          <a:ext cx="0" cy="0"/>
+          <a:chOff x="0" y="0"/>
+          <a:chExt cx="0" cy="0"/>
+        </a:xfrm>
+      </p:grpSpPr>
+      <p:sp>
+        <p:nvSpPr>
+          <p:cNvPr id="2" name="Shape 0"/>
+          <p:cNvSpPr/>
+          <p:nvPr/>
+        </p:nvSpPr>
+        <p:spPr>
+          <a:xfrm>
+            <a:off x="0" y="0"/>
+            <a:ext cx="12188952" cy="82296"/>
+          </a:xfrm>
+          <a:prstGeom prst="rect">
+            <a:avLst/>
+          </a:prstGeom>
+          <a:solidFill>
+            <a:srgbClr val="2D63FF"/>
+          </a:solidFill>
+          <a:ln/>
+        </p:spPr>
+      </p:sp>
+      <p:sp>
+        <p:nvSpPr>
+          <p:cNvPr id="3" name="Text 1"/>
+          <p:cNvSpPr txBox="1"/>
+          <p:nvPr/>
+        </p:nvSpPr>
+        <p:spPr>
+          <a:xfrm>
+            <a:off x="502920" y="6236208"/>
+            <a:ext cx="7772400" cy="365760"/>
+          </a:xfrm>
+          <a:prstGeom prst="rect">
+            <a:avLst/>
+          </a:prstGeom>
+          <a:noFill/>
+          <a:ln/>
+        </p:spPr>
+        <p:txBody>
+          <a:bodyPr wrap="square" lIns="0" tIns="0" rIns="0" bIns="0" rtlCol="0" anchor="ctr"/>
+          <a:lstStyle/>
+          <a:p>
+            <a:pPr indent="0" marL="0">
+              <a:buNone/>
+            </a:pPr>
+            <a:r>
+              <a:rPr lang="en-US" sz="1100" dirty="0">
+                <a:solidFill>
+                  <a:srgbClr val="667085"/>
+                </a:solidFill>
+                <a:latin typeface="IBM Plex Mono" pitchFamily="34" charset="0"/>
+                <a:ea typeface="IBM Plex Mono" pitchFamily="34" charset="-122"/>
+                <a:cs typeface="IBM Plex Mono" pitchFamily="34" charset="-120"/>
+              </a:rPr>
+              <a:t>2.1 Algorithms  |  Lesson 11</a:t>
+            </a:r>
+            <a:endParaRPr lang="en-US" sz="1100" dirty="0"/>
+          </a:p>
+        </p:txBody>
+      </p:sp>
+      <p:sp>
+        <p:nvSpPr>
+          <p:cNvPr id="4" name="Text 2"/>
+          <p:cNvSpPr txBox="1"/>
+          <p:nvPr/>
+        </p:nvSpPr>
+        <p:spPr>
+          <a:xfrm>
+            <a:off x="9326880" y="6236208"/>
+            <a:ext cx="2377440" cy="365760"/>
+          </a:xfrm>
+          <a:prstGeom prst="rect">
+            <a:avLst/>
+          </a:prstGeom>
+          <a:noFill/>
+          <a:ln/>
+        </p:spPr>
+        <p:txBody>
+          <a:bodyPr wrap="square" lIns="0" tIns="0" rIns="0" bIns="0" rtlCol="0" anchor="ctr"/>
+          <a:lstStyle/>
+          <a:p>
+            <a:pPr algn="r" indent="0" marL="0">
+              <a:buNone/>
+            </a:pPr>
+            <a:r>
+              <a:rPr lang="en-US" sz="1100" dirty="0">
+                <a:solidFill>
+                  <a:srgbClr val="667085"/>
+                </a:solidFill>
+                <a:latin typeface="IBM Plex Mono" pitchFamily="34" charset="0"/>
+                <a:ea typeface="IBM Plex Mono" pitchFamily="34" charset="-122"/>
+                <a:cs typeface="IBM Plex Mono" pitchFamily="34" charset="-120"/>
+              </a:rPr>
+              <a:t>Revise 360</a:t>
+            </a:r>
+            <a:endParaRPr lang="en-US" sz="1100" dirty="0"/>
+          </a:p>
+        </p:txBody>
+      </p:sp>
+      <p:sp>
+        <p:nvSpPr>
+          <p:cNvPr id="5" name="Text 3"/>
+          <p:cNvSpPr txBox="1"/>
+          <p:nvPr/>
+        </p:nvSpPr>
+        <p:spPr>
+          <a:xfrm>
+            <a:off x="502920" y="411480"/>
+            <a:ext cx="11155680" cy="777240"/>
+          </a:xfrm>
+          <a:prstGeom prst="rect">
+            <a:avLst/>
+          </a:prstGeom>
+          <a:noFill/>
+          <a:ln/>
+        </p:spPr>
+        <p:txBody>
+          <a:bodyPr wrap="square" lIns="0" tIns="0" rIns="0" bIns="0" rtlCol="0" anchor="ctr"/>
+          <a:lstStyle/>
+          <a:p>
+            <a:pPr indent="0" marL="0">
+              <a:buNone/>
+            </a:pPr>
+            <a:r>
+              <a:rPr lang="en-US" sz="3200" b="1" dirty="0">
+                <a:solidFill>
+                  <a:srgbClr val="101828"/>
+                </a:solidFill>
+                <a:latin typeface="IBM Plex Sans" pitchFamily="34" charset="0"/>
+                <a:ea typeface="IBM Plex Sans" pitchFamily="34" charset="-122"/>
+                <a:cs typeface="IBM Plex Sans" pitchFamily="34" charset="-120"/>
+              </a:rPr>
+              <a:t>Exam practice</a:t>
+            </a:r>
+            <a:endParaRPr lang="en-US" sz="3200" dirty="0"/>
+          </a:p>
+        </p:txBody>
+      </p:sp>
+      <p:sp>
+        <p:nvSpPr>
+          <p:cNvPr id="6" name="Text 4"/>
+          <p:cNvSpPr txBox="1"/>
+          <p:nvPr/>
+        </p:nvSpPr>
+        <p:spPr>
+          <a:xfrm>
+            <a:off x="502920" y="1170432"/>
+            <a:ext cx="11155680" cy="411480"/>
+          </a:xfrm>
+          <a:prstGeom prst="rect">
+            <a:avLst/>
+          </a:prstGeom>
+          <a:noFill/>
+          <a:ln/>
+        </p:spPr>
+        <p:txBody>
+          <a:bodyPr wrap="square" lIns="0" tIns="0" rIns="0" bIns="0" rtlCol="0" anchor="ctr"/>
+          <a:lstStyle/>
+          <a:p>
+            <a:pPr indent="0" marL="0">
+              <a:buNone/>
+            </a:pPr>
+            <a:r>
+              <a:rPr lang="en-US" sz="1500" dirty="0">
+                <a:solidFill>
+                  <a:srgbClr val="667085"/>
+                </a:solidFill>
+                <a:latin typeface="IBM Plex Sans" pitchFamily="34" charset="0"/>
+                <a:ea typeface="IBM Plex Sans" pitchFamily="34" charset="-122"/>
+                <a:cs typeface="IBM Plex Sans" pitchFamily="34" charset="-120"/>
+              </a:rPr>
+              <a:t>Devices away. Answer from memory on the worksheet.</a:t>
+            </a:r>
+            <a:endParaRPr lang="en-US" sz="1500" dirty="0"/>
+          </a:p>
+        </p:txBody>
+      </p:sp>
+      <p:sp>
+        <p:nvSpPr>
+          <p:cNvPr id="7" name="Shape 5"/>
+          <p:cNvSpPr/>
+          <p:nvPr/>
+        </p:nvSpPr>
+        <p:spPr>
+          <a:xfrm>
+            <a:off x="502920" y="1828800"/>
+            <a:ext cx="11155680" cy="1097280"/>
+          </a:xfrm>
+          <a:prstGeom prst="roundRect">
+            <a:avLst>
+              <a:gd name="adj" fmla="val 10000"/>
+            </a:avLst>
+          </a:prstGeom>
+          <a:solidFill>
+            <a:srgbClr val="FFFFFF"/>
+          </a:solidFill>
+          <a:ln w="15875">
+            <a:solidFill>
+              <a:srgbClr val="D9DEE7"/>
+            </a:solidFill>
+            <a:prstDash val="solid"/>
+          </a:ln>
+        </p:spPr>
+      </p:sp>
+      <p:sp>
+        <p:nvSpPr>
+          <p:cNvPr id="8" name="Text 6"/>
+          <p:cNvSpPr txBox="1"/>
+          <p:nvPr/>
+        </p:nvSpPr>
+        <p:spPr>
+          <a:xfrm>
+            <a:off x="914400" y="1938528"/>
+            <a:ext cx="9418320" cy="877824"/>
+          </a:xfrm>
+          <a:prstGeom prst="rect">
+            <a:avLst/>
+          </a:prstGeom>
+          <a:noFill/>
+          <a:ln/>
+        </p:spPr>
+        <p:txBody>
+          <a:bodyPr wrap="square" lIns="0" tIns="0" rIns="0" bIns="0" rtlCol="0" anchor="ctr"/>
+          <a:lstStyle/>
+          <a:p>
+            <a:pPr indent="0" marL="0">
+              <a:lnSpc>
+                <a:spcPct val="118000"/>
+              </a:lnSpc>
+              <a:buNone/>
+            </a:pPr>
+            <a:r>
+              <a:rPr lang="en-US" sz="1700" dirty="0">
+                <a:solidFill>
+                  <a:srgbClr val="101828"/>
+                </a:solidFill>
+                <a:latin typeface="IBM Plex Sans" pitchFamily="34" charset="0"/>
+                <a:ea typeface="IBM Plex Sans" pitchFamily="34" charset="-122"/>
+                <a:cs typeface="IBM Plex Sans" pitchFamily="34" charset="-120"/>
+              </a:rPr>
+              <a:t>State what is meant by a trace table.</a:t>
+            </a:r>
+            <a:endParaRPr lang="en-US" sz="1700" dirty="0"/>
+          </a:p>
+        </p:txBody>
+      </p:sp>
+      <p:sp>
+        <p:nvSpPr>
+          <p:cNvPr id="9" name="Shape 7"/>
+          <p:cNvSpPr/>
+          <p:nvPr/>
+        </p:nvSpPr>
+        <p:spPr>
+          <a:xfrm>
+            <a:off x="10515600" y="2130552"/>
+            <a:ext cx="868680" cy="493776"/>
+          </a:xfrm>
+          <a:prstGeom prst="roundRect">
+            <a:avLst>
+              <a:gd name="adj" fmla="val 18519"/>
+            </a:avLst>
+          </a:prstGeom>
+          <a:solidFill>
+            <a:srgbClr val="EEF2FB"/>
+          </a:solidFill>
+          <a:ln/>
+        </p:spPr>
+      </p:sp>
+      <p:sp>
+        <p:nvSpPr>
+          <p:cNvPr id="10" name="Text 8"/>
+          <p:cNvSpPr txBox="1"/>
+          <p:nvPr/>
+        </p:nvSpPr>
+        <p:spPr>
+          <a:xfrm>
+            <a:off x="10515600" y="2130552"/>
+            <a:ext cx="868680" cy="493776"/>
+          </a:xfrm>
+          <a:prstGeom prst="rect">
+            <a:avLst/>
+          </a:prstGeom>
+          <a:noFill/>
+          <a:ln/>
+        </p:spPr>
+        <p:txBody>
+          <a:bodyPr wrap="square" lIns="0" tIns="0" rIns="0" bIns="0" rtlCol="0" anchor="ctr"/>
+          <a:lstStyle/>
+          <a:p>
+            <a:pPr algn="ctr" indent="0" marL="0">
+              <a:buNone/>
+            </a:pPr>
+            <a:r>
+              <a:rPr lang="en-US" sz="1500" b="1" dirty="0">
+                <a:solidFill>
+                  <a:srgbClr val="2D63FF"/>
+                </a:solidFill>
+                <a:latin typeface="IBM Plex Mono" pitchFamily="34" charset="0"/>
+                <a:ea typeface="IBM Plex Mono" pitchFamily="34" charset="-122"/>
+                <a:cs typeface="IBM Plex Mono" pitchFamily="34" charset="-120"/>
+              </a:rPr>
+              <a:t>[2]</a:t>
+            </a:r>
+            <a:endParaRPr lang="en-US" sz="1500" dirty="0"/>
+          </a:p>
+        </p:txBody>
+      </p:sp>
+      <p:sp>
+        <p:nvSpPr>
+          <p:cNvPr id="11" name="Shape 9"/>
+          <p:cNvSpPr/>
+          <p:nvPr/>
+        </p:nvSpPr>
+        <p:spPr>
+          <a:xfrm>
+            <a:off x="502920" y="3127248"/>
+            <a:ext cx="11155680" cy="1097280"/>
+          </a:xfrm>
+          <a:prstGeom prst="roundRect">
+            <a:avLst>
+              <a:gd name="adj" fmla="val 10000"/>
+            </a:avLst>
+          </a:prstGeom>
+          <a:solidFill>
+            <a:srgbClr val="FFFFFF"/>
+          </a:solidFill>
+          <a:ln w="15875">
+            <a:solidFill>
+              <a:srgbClr val="D9DEE7"/>
+            </a:solidFill>
+            <a:prstDash val="solid"/>
+          </a:ln>
+        </p:spPr>
+      </p:sp>
+      <p:sp>
+        <p:nvSpPr>
+          <p:cNvPr id="12" name="Text 10"/>
+          <p:cNvSpPr txBox="1"/>
+          <p:nvPr/>
+        </p:nvSpPr>
+        <p:spPr>
+          <a:xfrm>
+            <a:off x="914400" y="3236976"/>
+            <a:ext cx="9418320" cy="877824"/>
+          </a:xfrm>
+          <a:prstGeom prst="rect">
+            <a:avLst/>
+          </a:prstGeom>
+          <a:noFill/>
+          <a:ln/>
+        </p:spPr>
+        <p:txBody>
+          <a:bodyPr wrap="square" lIns="0" tIns="0" rIns="0" bIns="0" rtlCol="0" anchor="ctr"/>
+          <a:lstStyle/>
+          <a:p>
+            <a:pPr indent="0" marL="0">
+              <a:lnSpc>
+                <a:spcPct val="118000"/>
+              </a:lnSpc>
+              <a:buNone/>
+            </a:pPr>
+            <a:r>
+              <a:rPr lang="en-US" sz="1700" dirty="0">
+                <a:solidFill>
+                  <a:srgbClr val="101828"/>
+                </a:solidFill>
+                <a:latin typeface="IBM Plex Sans" pitchFamily="34" charset="0"/>
+                <a:ea typeface="IBM Plex Sans" pitchFamily="34" charset="-122"/>
+                <a:cs typeface="IBM Plex Sans" pitchFamily="34" charset="-120"/>
+              </a:rPr>
+              <a:t>Explain how a trace table helps a programmer find a logic error.</a:t>
+            </a:r>
+            <a:endParaRPr lang="en-US" sz="1700" dirty="0"/>
+          </a:p>
+        </p:txBody>
+      </p:sp>
+      <p:sp>
+        <p:nvSpPr>
+          <p:cNvPr id="13" name="Shape 11"/>
+          <p:cNvSpPr/>
+          <p:nvPr/>
+        </p:nvSpPr>
+        <p:spPr>
+          <a:xfrm>
+            <a:off x="10515600" y="3429000"/>
+            <a:ext cx="868680" cy="493776"/>
+          </a:xfrm>
+          <a:prstGeom prst="roundRect">
+            <a:avLst>
+              <a:gd name="adj" fmla="val 18519"/>
+            </a:avLst>
+          </a:prstGeom>
+          <a:solidFill>
+            <a:srgbClr val="EEF2FB"/>
+          </a:solidFill>
+          <a:ln/>
+        </p:spPr>
+      </p:sp>
+      <p:sp>
+        <p:nvSpPr>
+          <p:cNvPr id="14" name="Text 12"/>
+          <p:cNvSpPr txBox="1"/>
+          <p:nvPr/>
+        </p:nvSpPr>
+        <p:spPr>
+          <a:xfrm>
+            <a:off x="10515600" y="3429000"/>
+            <a:ext cx="868680" cy="493776"/>
+          </a:xfrm>
+          <a:prstGeom prst="rect">
+            <a:avLst/>
+          </a:prstGeom>
+          <a:noFill/>
+          <a:ln/>
+        </p:spPr>
+        <p:txBody>
+          <a:bodyPr wrap="square" lIns="0" tIns="0" rIns="0" bIns="0" rtlCol="0" anchor="ctr"/>
+          <a:lstStyle/>
+          <a:p>
+            <a:pPr algn="ctr" indent="0" marL="0">
+              <a:buNone/>
+            </a:pPr>
+            <a:r>
+              <a:rPr lang="en-US" sz="1500" b="1" dirty="0">
+                <a:solidFill>
+                  <a:srgbClr val="2D63FF"/>
+                </a:solidFill>
+                <a:latin typeface="IBM Plex Mono" pitchFamily="34" charset="0"/>
+                <a:ea typeface="IBM Plex Mono" pitchFamily="34" charset="-122"/>
+                <a:cs typeface="IBM Plex Mono" pitchFamily="34" charset="-120"/>
+              </a:rPr>
+              <a:t>[3]</a:t>
+            </a:r>
+            <a:endParaRPr lang="en-US" sz="1500" dirty="0"/>
+          </a:p>
+        </p:txBody>
+      </p:sp>
+      <p:sp>
+        <p:nvSpPr>
+          <p:cNvPr id="15" name="Shape 13"/>
+          <p:cNvSpPr/>
+          <p:nvPr/>
+        </p:nvSpPr>
+        <p:spPr>
+          <a:xfrm>
+            <a:off x="502920" y="4425696"/>
+            <a:ext cx="11155680" cy="1097280"/>
+          </a:xfrm>
+          <a:prstGeom prst="roundRect">
+            <a:avLst>
+              <a:gd name="adj" fmla="val 10000"/>
+            </a:avLst>
+          </a:prstGeom>
+          <a:solidFill>
+            <a:srgbClr val="FFFFFF"/>
+          </a:solidFill>
+          <a:ln w="15875">
+            <a:solidFill>
+              <a:srgbClr val="D9DEE7"/>
+            </a:solidFill>
+            <a:prstDash val="solid"/>
+          </a:ln>
+        </p:spPr>
+      </p:sp>
+      <p:sp>
+        <p:nvSpPr>
+          <p:cNvPr id="16" name="Text 14"/>
+          <p:cNvSpPr txBox="1"/>
+          <p:nvPr/>
+        </p:nvSpPr>
+        <p:spPr>
+          <a:xfrm>
+            <a:off x="914400" y="4535424"/>
+            <a:ext cx="9418320" cy="877824"/>
+          </a:xfrm>
+          <a:prstGeom prst="rect">
+            <a:avLst/>
+          </a:prstGeom>
+          <a:noFill/>
+          <a:ln/>
+        </p:spPr>
+        <p:txBody>
+          <a:bodyPr wrap="square" lIns="0" tIns="0" rIns="0" bIns="0" rtlCol="0" anchor="ctr"/>
+          <a:lstStyle/>
+          <a:p>
+            <a:pPr indent="0" marL="0">
+              <a:lnSpc>
+                <a:spcPct val="118000"/>
+              </a:lnSpc>
+              <a:buNone/>
+            </a:pPr>
+            <a:r>
+              <a:rPr lang="en-US" sz="1700" dirty="0">
+                <a:solidFill>
+                  <a:srgbClr val="101828"/>
+                </a:solidFill>
+                <a:latin typeface="IBM Plex Sans" pitchFamily="34" charset="0"/>
+                <a:ea typeface="IBM Plex Sans" pitchFamily="34" charset="-122"/>
+                <a:cs typeface="IBM Plex Sans" pitchFamily="34" charset="-120"/>
+              </a:rPr>
+              <a:t>Complete the trace table for the program shown, which is run with an input of 9.</a:t>
+            </a:r>
+            <a:endParaRPr lang="en-US" sz="1700" dirty="0"/>
+          </a:p>
+        </p:txBody>
+      </p:sp>
+      <p:sp>
+        <p:nvSpPr>
+          <p:cNvPr id="17" name="Shape 15"/>
+          <p:cNvSpPr/>
+          <p:nvPr/>
+        </p:nvSpPr>
+        <p:spPr>
+          <a:xfrm>
+            <a:off x="10515600" y="4727448"/>
+            <a:ext cx="868680" cy="493776"/>
+          </a:xfrm>
+          <a:prstGeom prst="roundRect">
+            <a:avLst>
+              <a:gd name="adj" fmla="val 18519"/>
+            </a:avLst>
+          </a:prstGeom>
+          <a:solidFill>
+            <a:srgbClr val="EEF2FB"/>
+          </a:solidFill>
+          <a:ln/>
+        </p:spPr>
+      </p:sp>
+      <p:sp>
+        <p:nvSpPr>
+          <p:cNvPr id="18" name="Text 16"/>
+          <p:cNvSpPr txBox="1"/>
+          <p:nvPr/>
+        </p:nvSpPr>
+        <p:spPr>
+          <a:xfrm>
+            <a:off x="10515600" y="4727448"/>
+            <a:ext cx="868680" cy="493776"/>
+          </a:xfrm>
+          <a:prstGeom prst="rect">
+            <a:avLst/>
+          </a:prstGeom>
+          <a:noFill/>
+          <a:ln/>
+        </p:spPr>
+        <p:txBody>
+          <a:bodyPr wrap="square" lIns="0" tIns="0" rIns="0" bIns="0" rtlCol="0" anchor="ctr"/>
+          <a:lstStyle/>
+          <a:p>
+            <a:pPr algn="ctr" indent="0" marL="0">
+              <a:buNone/>
+            </a:pPr>
+            <a:r>
+              <a:rPr lang="en-US" sz="1500" b="1" dirty="0">
+                <a:solidFill>
+                  <a:srgbClr val="2D63FF"/>
+                </a:solidFill>
+                <a:latin typeface="IBM Plex Mono" pitchFamily="34" charset="0"/>
+                <a:ea typeface="IBM Plex Mono" pitchFamily="34" charset="-122"/>
+                <a:cs typeface="IBM Plex Mono" pitchFamily="34" charset="-120"/>
+              </a:rPr>
+              <a:t>[6]</a:t>
+            </a:r>
+            <a:endParaRPr lang="en-US" sz="1500" dirty="0"/>
+          </a:p>
+        </p:txBody>
+      </p:sp>
+    </p:spTree>
+  </p:cSld>
+  <p:clrMapOvr>
+    <a:masterClrMapping/>
+  </p:clrMapOvr>
+</p:sld>
+</file>
+
+<file path=ppt/slides/slide16.xml><?xml version="1.0" encoding="utf-8"?>
+<p:sld xmlns:a="http://schemas.openxmlformats.org/drawingml/2006/main" xmlns:r="http://schemas.openxmlformats.org/officeDocument/2006/relationships" xmlns:p="http://schemas.openxmlformats.org/presentationml/2006/main">
+  <p:cSld name="Slide 16">
     <p:bg>
       <p:bgPr>
         <a:solidFill>
